--- a/slides/June-26.pptx
+++ b/slides/June-26.pptx
@@ -3268,25 +3268,25 @@
           <a:p>
             <a:pPr algn="l"/>
             <a:r>
-              <a:rPr sz="4000" b="0">
+              <a:rPr sz="4000">
                 <a:solidFill>
                   <a:srgbClr val="0F2740"/>
                 </a:solidFill>
                 <a:latin typeface="Arial Black"/>
               </a:rPr>
-              <a:t>Topic</a:t>
+              <a:t>How to Use AI Correctly</a:t>
             </a:r>
           </a:p>
           <a:p>
             <a:pPr algn="l"/>
             <a:r>
-              <a:rPr sz="4000" b="0">
+              <a:rPr sz="4000">
                 <a:solidFill>
                   <a:srgbClr val="0F2740"/>
                 </a:solidFill>
                 <a:latin typeface="Arial Black"/>
               </a:rPr>
-              <a:t>TBD</a:t>
+              <a:t>In a Real Project</a:t>
             </a:r>
           </a:p>
         </p:txBody>
@@ -3321,7 +3321,25 @@
                 </a:solidFill>
                 <a:latin typeface="Calibri"/>
               </a:rPr>
-              <a:t>Fill in today's session focus before class.</a:t>
+              <a:t>Prompts are easy — </a:t>
+            </a:r>
+            <a:r>
+              <a:rPr sz="1700" b="1">
+                <a:solidFill>
+                  <a:srgbClr val="F97316"/>
+                </a:solidFill>
+                <a:latin typeface="Calibri"/>
+              </a:rPr>
+              <a:t>real projects</a:t>
+            </a:r>
+            <a:r>
+              <a:rPr sz="1700" b="0">
+                <a:solidFill>
+                  <a:srgbClr val="47566B"/>
+                </a:solidFill>
+                <a:latin typeface="Calibri"/>
+              </a:rPr>
+              <a:t> need plans, tests, and review.</a:t>
             </a:r>
           </a:p>
         </p:txBody>

--- a/slides/June-26.pptx
+++ b/slides/June-26.pptx
@@ -6,6 +6,7 @@
   </p:sldMasterIdLst>
   <p:sldIdLst>
     <p:sldId id="256" r:id="rId7"/>
+    <p:sldId id="257" r:id="rId8"/>
   </p:sldIdLst>
   <p:sldSz cx="12191695" cy="6858000" type="screen4x3"/>
   <p:notesSz cx="6858000" cy="9144000"/>
@@ -3516,6 +3517,585 @@
           <a:lstStyle/>
           <a:p>
             <a:pPr algn="ctr"/>
+          </a:p>
+        </p:txBody>
+      </p:sp>
+    </p:spTree>
+  </p:cSld>
+  <p:clrMapOvr>
+    <a:masterClrMapping/>
+  </p:clrMapOvr>
+</p:sld>
+</file>
+
+<file path=ppt/slides/slide2.xml><?xml version="1.0" encoding="utf-8"?>
+<p:sld xmlns:a="http://schemas.openxmlformats.org/drawingml/2006/main" xmlns:p="http://schemas.openxmlformats.org/presentationml/2006/main" xmlns:r="http://schemas.openxmlformats.org/officeDocument/2006/relationships">
+  <p:cSld>
+    <p:spTree>
+      <p:nvGrpSpPr>
+        <p:cNvPr id="1" name=""/>
+        <p:cNvGrpSpPr/>
+        <p:nvPr/>
+      </p:nvGrpSpPr>
+      <p:grpSpPr/>
+      <p:sp>
+        <p:nvSpPr>
+          <p:cNvPr id="2" name="Rectangle 1"/>
+          <p:cNvSpPr/>
+          <p:nvPr/>
+        </p:nvSpPr>
+        <p:spPr>
+          <a:xfrm>
+            <a:off x="0" y="0"/>
+            <a:ext cx="12191695" cy="6858000"/>
+          </a:xfrm>
+          <a:prstGeom prst="rect">
+            <a:avLst/>
+          </a:prstGeom>
+          <a:solidFill>
+            <a:srgbClr val="F4F8FC"/>
+          </a:solidFill>
+          <a:ln>
+            <a:noFill/>
+          </a:ln>
+        </p:spPr>
+        <p:style>
+          <a:lnRef idx="1">
+            <a:schemeClr val="accent1"/>
+          </a:lnRef>
+          <a:fillRef idx="3">
+            <a:schemeClr val="accent1"/>
+          </a:fillRef>
+          <a:effectRef idx="2">
+            <a:schemeClr val="accent1"/>
+          </a:effectRef>
+          <a:fontRef idx="minor">
+            <a:schemeClr val="lt1"/>
+          </a:fontRef>
+        </p:style>
+        <p:txBody>
+          <a:bodyPr rtlCol="0" anchor="ctr"/>
+          <a:lstStyle/>
+          <a:p>
+            <a:pPr algn="ctr"/>
+          </a:p>
+        </p:txBody>
+      </p:sp>
+      <p:sp>
+        <p:nvSpPr>
+          <p:cNvPr id="3" name="Rectangle 2"/>
+          <p:cNvSpPr/>
+          <p:nvPr/>
+        </p:nvSpPr>
+        <p:spPr>
+          <a:xfrm>
+            <a:off x="11475720" y="384048"/>
+            <a:ext cx="118872" cy="118872"/>
+          </a:xfrm>
+          <a:prstGeom prst="rect">
+            <a:avLst/>
+          </a:prstGeom>
+          <a:solidFill>
+            <a:srgbClr val="0EA5E9"/>
+          </a:solidFill>
+          <a:ln>
+            <a:noFill/>
+          </a:ln>
+        </p:spPr>
+        <p:style>
+          <a:lnRef idx="1">
+            <a:schemeClr val="accent1"/>
+          </a:lnRef>
+          <a:fillRef idx="3">
+            <a:schemeClr val="accent1"/>
+          </a:fillRef>
+          <a:effectRef idx="2">
+            <a:schemeClr val="accent1"/>
+          </a:effectRef>
+          <a:fontRef idx="minor">
+            <a:schemeClr val="lt1"/>
+          </a:fontRef>
+        </p:style>
+        <p:txBody>
+          <a:bodyPr rtlCol="0" anchor="ctr"/>
+          <a:lstStyle/>
+          <a:p>
+            <a:pPr algn="ctr"/>
+          </a:p>
+        </p:txBody>
+      </p:sp>
+      <p:sp>
+        <p:nvSpPr>
+          <p:cNvPr id="4" name="Rectangle 3"/>
+          <p:cNvSpPr/>
+          <p:nvPr/>
+        </p:nvSpPr>
+        <p:spPr>
+          <a:xfrm>
+            <a:off x="11649456" y="384048"/>
+            <a:ext cx="118872" cy="118872"/>
+          </a:xfrm>
+          <a:prstGeom prst="rect">
+            <a:avLst/>
+          </a:prstGeom>
+          <a:solidFill>
+            <a:srgbClr val="F97316"/>
+          </a:solidFill>
+          <a:ln>
+            <a:noFill/>
+          </a:ln>
+        </p:spPr>
+        <p:style>
+          <a:lnRef idx="1">
+            <a:schemeClr val="accent1"/>
+          </a:lnRef>
+          <a:fillRef idx="3">
+            <a:schemeClr val="accent1"/>
+          </a:fillRef>
+          <a:effectRef idx="2">
+            <a:schemeClr val="accent1"/>
+          </a:effectRef>
+          <a:fontRef idx="minor">
+            <a:schemeClr val="lt1"/>
+          </a:fontRef>
+        </p:style>
+        <p:txBody>
+          <a:bodyPr rtlCol="0" anchor="ctr"/>
+          <a:lstStyle/>
+          <a:p>
+            <a:pPr algn="ctr"/>
+          </a:p>
+        </p:txBody>
+      </p:sp>
+      <p:sp>
+        <p:nvSpPr>
+          <p:cNvPr id="5" name="TextBox 4"/>
+          <p:cNvSpPr txBox="1"/>
+          <p:nvPr/>
+        </p:nvSpPr>
+        <p:spPr>
+          <a:xfrm>
+            <a:off x="502920" y="6510528"/>
+            <a:ext cx="4572000" cy="274320"/>
+          </a:xfrm>
+          <a:prstGeom prst="rect">
+            <a:avLst/>
+          </a:prstGeom>
+          <a:noFill/>
+        </p:spPr>
+        <p:txBody>
+          <a:bodyPr wrap="none">
+            <a:spAutoFit/>
+          </a:bodyPr>
+          <a:lstStyle/>
+          <a:p>
+            <a:r>
+              <a:rPr sz="800" b="0">
+                <a:solidFill>
+                  <a:srgbClr val="8FA3BC"/>
+                </a:solidFill>
+                <a:latin typeface="Calibri"/>
+              </a:rPr>
+              <a:t>Vibe Coding  ·  June 26, 2026</a:t>
+            </a:r>
+          </a:p>
+        </p:txBody>
+      </p:sp>
+      <p:sp>
+        <p:nvSpPr>
+          <p:cNvPr id="6" name="TextBox 5"/>
+          <p:cNvSpPr txBox="1"/>
+          <p:nvPr/>
+        </p:nvSpPr>
+        <p:spPr>
+          <a:xfrm>
+            <a:off x="502920" y="292608"/>
+            <a:ext cx="8229600" cy="274320"/>
+          </a:xfrm>
+          <a:prstGeom prst="rect">
+            <a:avLst/>
+          </a:prstGeom>
+          <a:noFill/>
+        </p:spPr>
+        <p:txBody>
+          <a:bodyPr wrap="none">
+            <a:spAutoFit/>
+          </a:bodyPr>
+          <a:lstStyle/>
+          <a:p>
+            <a:r>
+              <a:rPr sz="1050" b="1">
+                <a:solidFill>
+                  <a:srgbClr val="0284C7"/>
+                </a:solidFill>
+                <a:latin typeface="Arial"/>
+              </a:rPr>
+              <a:t>THE REALITY</a:t>
+            </a:r>
+          </a:p>
+        </p:txBody>
+      </p:sp>
+      <p:sp>
+        <p:nvSpPr>
+          <p:cNvPr id="7" name="TextBox 6"/>
+          <p:cNvSpPr txBox="1"/>
+          <p:nvPr/>
+        </p:nvSpPr>
+        <p:spPr>
+          <a:xfrm>
+            <a:off x="502920" y="530352"/>
+            <a:ext cx="10241280" cy="640080"/>
+          </a:xfrm>
+          <a:prstGeom prst="rect">
+            <a:avLst/>
+          </a:prstGeom>
+          <a:noFill/>
+        </p:spPr>
+        <p:txBody>
+          <a:bodyPr wrap="none">
+            <a:spAutoFit/>
+          </a:bodyPr>
+          <a:lstStyle/>
+          <a:p>
+            <a:r>
+              <a:rPr sz="2700" b="0">
+                <a:solidFill>
+                  <a:srgbClr val="0F2740"/>
+                </a:solidFill>
+                <a:latin typeface="Arial Black"/>
+              </a:rPr>
+              <a:t>How Do You Use AI Today?</a:t>
+            </a:r>
+          </a:p>
+        </p:txBody>
+      </p:sp>
+      <p:sp>
+        <p:nvSpPr>
+          <p:cNvPr id="8" name="Rounded Rectangle 7"/>
+          <p:cNvSpPr/>
+          <p:nvPr/>
+        </p:nvSpPr>
+        <p:spPr>
+          <a:xfrm>
+            <a:off x="502920" y="1600200"/>
+            <a:ext cx="4572000" cy="3657600"/>
+          </a:xfrm>
+          <a:prstGeom prst="roundRect">
+            <a:avLst/>
+          </a:prstGeom>
+          <a:solidFill>
+            <a:srgbClr val="FFFFFF"/>
+          </a:solidFill>
+          <a:ln w="12700">
+            <a:solidFill>
+              <a:srgbClr val="DCE6F0"/>
+            </a:solidFill>
+          </a:ln>
+        </p:spPr>
+        <p:style>
+          <a:lnRef idx="1">
+            <a:schemeClr val="accent1"/>
+          </a:lnRef>
+          <a:fillRef idx="3">
+            <a:schemeClr val="accent1"/>
+          </a:fillRef>
+          <a:effectRef idx="2">
+            <a:schemeClr val="accent1"/>
+          </a:effectRef>
+          <a:fontRef idx="minor">
+            <a:schemeClr val="lt1"/>
+          </a:fontRef>
+        </p:style>
+        <p:txBody>
+          <a:bodyPr rtlCol="0" anchor="ctr" lIns="355600" rIns="355600" tIns="304800" wrap="square"/>
+          <a:lstStyle/>
+          <a:p>
+            <a:pPr algn="ctr"/>
+            <a:r>
+              <a:rPr sz="1800" b="1">
+                <a:solidFill>
+                  <a:srgbClr val="0F2740"/>
+                </a:solidFill>
+                <a:latin typeface="Arial Black"/>
+              </a:rPr>
+              <a:t>The usual loop</a:t>
+            </a:r>
+          </a:p>
+          <a:p>
+            <a:pPr>
+              <a:spcBef>
+                <a:spcPts val="600"/>
+              </a:spcBef>
+            </a:pPr>
+            <a:r>
+              <a:rPr sz="1600" b="0">
+                <a:solidFill>
+                  <a:srgbClr val="47566B"/>
+                </a:solidFill>
+                <a:latin typeface="Calibri"/>
+              </a:rPr>
+              <a:t/>
+            </a:r>
+          </a:p>
+          <a:p>
+            <a:pPr>
+              <a:spcBef>
+                <a:spcPts val="600"/>
+              </a:spcBef>
+            </a:pPr>
+            <a:r>
+              <a:rPr sz="1600" b="1">
+                <a:solidFill>
+                  <a:srgbClr val="0284C7"/>
+                </a:solidFill>
+                <a:latin typeface="Calibri"/>
+              </a:rPr>
+              <a:t>1.  Write a simple prompt</a:t>
+            </a:r>
+          </a:p>
+          <a:p>
+            <a:pPr>
+              <a:spcBef>
+                <a:spcPts val="600"/>
+              </a:spcBef>
+            </a:pPr>
+            <a:r>
+              <a:rPr sz="1600" b="1">
+                <a:solidFill>
+                  <a:srgbClr val="0284C7"/>
+                </a:solidFill>
+                <a:latin typeface="Calibri"/>
+              </a:rPr>
+              <a:t>2.  Run it</a:t>
+            </a:r>
+          </a:p>
+          <a:p>
+            <a:pPr>
+              <a:spcBef>
+                <a:spcPts val="600"/>
+              </a:spcBef>
+            </a:pPr>
+            <a:r>
+              <a:rPr sz="1600" b="1">
+                <a:solidFill>
+                  <a:srgbClr val="0284C7"/>
+                </a:solidFill>
+                <a:latin typeface="Calibri"/>
+              </a:rPr>
+              <a:t>3.  Something breaks</a:t>
+            </a:r>
+          </a:p>
+          <a:p>
+            <a:pPr>
+              <a:spcBef>
+                <a:spcPts val="600"/>
+              </a:spcBef>
+            </a:pPr>
+            <a:r>
+              <a:rPr sz="1600" b="1">
+                <a:solidFill>
+                  <a:srgbClr val="0284C7"/>
+                </a:solidFill>
+                <a:latin typeface="Calibri"/>
+              </a:rPr>
+              <a:t>4.  Patch with another prompt</a:t>
+            </a:r>
+          </a:p>
+          <a:p>
+            <a:pPr>
+              <a:spcBef>
+                <a:spcPts val="600"/>
+              </a:spcBef>
+            </a:pPr>
+            <a:r>
+              <a:rPr sz="1600" b="1">
+                <a:solidFill>
+                  <a:srgbClr val="0284C7"/>
+                </a:solidFill>
+                <a:latin typeface="Calibri"/>
+              </a:rPr>
+              <a:t>5.  Repeat…</a:t>
+            </a:r>
+          </a:p>
+        </p:txBody>
+      </p:sp>
+      <p:sp>
+        <p:nvSpPr>
+          <p:cNvPr id="9" name="TextBox 8"/>
+          <p:cNvSpPr txBox="1"/>
+          <p:nvPr/>
+        </p:nvSpPr>
+        <p:spPr>
+          <a:xfrm>
+            <a:off x="5486400" y="1691640"/>
+            <a:ext cx="6035040" cy="457200"/>
+          </a:xfrm>
+          <a:prstGeom prst="rect">
+            <a:avLst/>
+          </a:prstGeom>
+          <a:noFill/>
+        </p:spPr>
+        <p:txBody>
+          <a:bodyPr wrap="none">
+            <a:spAutoFit/>
+          </a:bodyPr>
+          <a:lstStyle/>
+          <a:p>
+            <a:r>
+              <a:rPr sz="1600" b="1">
+                <a:solidFill>
+                  <a:srgbClr val="0F2740"/>
+                </a:solidFill>
+                <a:latin typeface="Calibri"/>
+              </a:rPr>
+              <a:t>Most people never leave step 1.</a:t>
+            </a:r>
+          </a:p>
+        </p:txBody>
+      </p:sp>
+      <p:sp>
+        <p:nvSpPr>
+          <p:cNvPr id="10" name="TextBox 9"/>
+          <p:cNvSpPr txBox="1"/>
+          <p:nvPr/>
+        </p:nvSpPr>
+        <p:spPr>
+          <a:xfrm>
+            <a:off x="5486400" y="2194560"/>
+            <a:ext cx="6035040" cy="2926080"/>
+          </a:xfrm>
+          <a:prstGeom prst="rect">
+            <a:avLst/>
+          </a:prstGeom>
+          <a:noFill/>
+        </p:spPr>
+        <p:txBody>
+          <a:bodyPr wrap="square">
+            <a:spAutoFit/>
+          </a:bodyPr>
+          <a:lstStyle/>
+          <a:p>
+            <a:pPr>
+              <a:spcBef>
+                <a:spcPts val="1000"/>
+              </a:spcBef>
+            </a:pPr>
+            <a:r>
+              <a:rPr sz="1350" b="0">
+                <a:solidFill>
+                  <a:srgbClr val="47566B"/>
+                </a:solidFill>
+                <a:latin typeface="Calibri"/>
+              </a:rPr>
+              <a:t>•  That workflow delivers a quick demo — not a real engineering project.</a:t>
+            </a:r>
+          </a:p>
+          <a:p>
+            <a:pPr>
+              <a:spcBef>
+                <a:spcPts val="1000"/>
+              </a:spcBef>
+            </a:pPr>
+            <a:r>
+              <a:rPr sz="1350" b="0">
+                <a:solidFill>
+                  <a:srgbClr val="47566B"/>
+                </a:solidFill>
+                <a:latin typeface="Calibri"/>
+              </a:rPr>
+              <a:t>•  Complex systems have many modules and tangled dependencies.</a:t>
+            </a:r>
+          </a:p>
+          <a:p>
+            <a:pPr>
+              <a:spcBef>
+                <a:spcPts val="1000"/>
+              </a:spcBef>
+            </a:pPr>
+            <a:r>
+              <a:rPr sz="1350" b="0">
+                <a:solidFill>
+                  <a:srgbClr val="47566B"/>
+                </a:solidFill>
+                <a:latin typeface="Calibri"/>
+              </a:rPr>
+              <a:t>•  Change one part without a plan → fix east, break west.</a:t>
+            </a:r>
+          </a:p>
+          <a:p>
+            <a:pPr>
+              <a:spcBef>
+                <a:spcPts val="1000"/>
+              </a:spcBef>
+            </a:pPr>
+            <a:r>
+              <a:rPr sz="1350" b="0">
+                <a:solidFill>
+                  <a:srgbClr val="47566B"/>
+                </a:solidFill>
+                <a:latin typeface="Calibri"/>
+              </a:rPr>
+              <a:t>•  Prompts without design don't scale — they just move the bug around.</a:t>
+            </a:r>
+          </a:p>
+          <a:p>
+            <a:pPr>
+              <a:spcBef>
+                <a:spcPts val="1000"/>
+              </a:spcBef>
+            </a:pPr>
+            <a:r>
+              <a:rPr sz="1350" b="0">
+                <a:solidFill>
+                  <a:srgbClr val="47566B"/>
+                </a:solidFill>
+                <a:latin typeface="Calibri"/>
+              </a:rPr>
+              <a:t>•  AI is getting stronger, but it still can't replace structure.</a:t>
+            </a:r>
+          </a:p>
+        </p:txBody>
+      </p:sp>
+      <p:sp>
+        <p:nvSpPr>
+          <p:cNvPr id="11" name="TextBox 10"/>
+          <p:cNvSpPr txBox="1"/>
+          <p:nvPr/>
+        </p:nvSpPr>
+        <p:spPr>
+          <a:xfrm>
+            <a:off x="502920" y="5669280"/>
+            <a:ext cx="11155680" cy="320040"/>
+          </a:xfrm>
+          <a:prstGeom prst="rect">
+            <a:avLst/>
+          </a:prstGeom>
+          <a:noFill/>
+        </p:spPr>
+        <p:txBody>
+          <a:bodyPr wrap="none">
+            <a:spAutoFit/>
+          </a:bodyPr>
+          <a:lstStyle/>
+          <a:p>
+            <a:r>
+              <a:rPr sz="1250" b="1">
+                <a:solidFill>
+                  <a:srgbClr val="F97316"/>
+                </a:solidFill>
+                <a:latin typeface="Calibri"/>
+              </a:rPr>
+              <a:t>A stronger model </a:t>
+            </a:r>
+            <a:r>
+              <a:rPr sz="1250" b="0">
+                <a:solidFill>
+                  <a:srgbClr val="47566B"/>
+                </a:solidFill>
+                <a:latin typeface="Calibri"/>
+              </a:rPr>
+              <a:t>doesn't fix a missing plan.</a:t>
+            </a:r>
           </a:p>
         </p:txBody>
       </p:sp>

--- a/slides/June-26.pptx
+++ b/slides/June-26.pptx
@@ -7,6 +7,15 @@
   <p:sldIdLst>
     <p:sldId id="256" r:id="rId7"/>
     <p:sldId id="257" r:id="rId8"/>
+    <p:sldId id="258" r:id="rId9"/>
+    <p:sldId id="259" r:id="rId10"/>
+    <p:sldId id="260" r:id="rId11"/>
+    <p:sldId id="261" r:id="rId12"/>
+    <p:sldId id="262" r:id="rId13"/>
+    <p:sldId id="263" r:id="rId14"/>
+    <p:sldId id="264" r:id="rId15"/>
+    <p:sldId id="265" r:id="rId16"/>
+    <p:sldId id="266" r:id="rId17"/>
   </p:sldIdLst>
   <p:sldSz cx="12191695" cy="6858000" type="screen4x3"/>
   <p:notesSz cx="6858000" cy="9144000"/>
@@ -3528,6 +3537,1617 @@
 </p:sld>
 </file>
 
+<file path=ppt/slides/slide10.xml><?xml version="1.0" encoding="utf-8"?>
+<p:sld xmlns:a="http://schemas.openxmlformats.org/drawingml/2006/main" xmlns:p="http://schemas.openxmlformats.org/presentationml/2006/main" xmlns:r="http://schemas.openxmlformats.org/officeDocument/2006/relationships">
+  <p:cSld>
+    <p:spTree>
+      <p:nvGrpSpPr>
+        <p:cNvPr id="1" name=""/>
+        <p:cNvGrpSpPr/>
+        <p:nvPr/>
+      </p:nvGrpSpPr>
+      <p:grpSpPr/>
+      <p:sp>
+        <p:nvSpPr>
+          <p:cNvPr id="2" name="Rectangle 1"/>
+          <p:cNvSpPr/>
+          <p:nvPr/>
+        </p:nvSpPr>
+        <p:spPr>
+          <a:xfrm>
+            <a:off x="0" y="0"/>
+            <a:ext cx="12191695" cy="6858000"/>
+          </a:xfrm>
+          <a:prstGeom prst="rect">
+            <a:avLst/>
+          </a:prstGeom>
+          <a:solidFill>
+            <a:srgbClr val="F4F8FC"/>
+          </a:solidFill>
+          <a:ln>
+            <a:noFill/>
+          </a:ln>
+        </p:spPr>
+        <p:style>
+          <a:lnRef idx="1">
+            <a:schemeClr val="accent1"/>
+          </a:lnRef>
+          <a:fillRef idx="3">
+            <a:schemeClr val="accent1"/>
+          </a:fillRef>
+          <a:effectRef idx="2">
+            <a:schemeClr val="accent1"/>
+          </a:effectRef>
+          <a:fontRef idx="minor">
+            <a:schemeClr val="lt1"/>
+          </a:fontRef>
+        </p:style>
+        <p:txBody>
+          <a:bodyPr rtlCol="0" anchor="ctr"/>
+          <a:lstStyle/>
+          <a:p>
+            <a:pPr algn="ctr"/>
+          </a:p>
+        </p:txBody>
+      </p:sp>
+      <p:sp>
+        <p:nvSpPr>
+          <p:cNvPr id="3" name="Rectangle 2"/>
+          <p:cNvSpPr/>
+          <p:nvPr/>
+        </p:nvSpPr>
+        <p:spPr>
+          <a:xfrm>
+            <a:off x="11475720" y="384048"/>
+            <a:ext cx="118872" cy="118872"/>
+          </a:xfrm>
+          <a:prstGeom prst="rect">
+            <a:avLst/>
+          </a:prstGeom>
+          <a:solidFill>
+            <a:srgbClr val="0EA5E9"/>
+          </a:solidFill>
+          <a:ln>
+            <a:noFill/>
+          </a:ln>
+        </p:spPr>
+        <p:style>
+          <a:lnRef idx="1">
+            <a:schemeClr val="accent1"/>
+          </a:lnRef>
+          <a:fillRef idx="3">
+            <a:schemeClr val="accent1"/>
+          </a:fillRef>
+          <a:effectRef idx="2">
+            <a:schemeClr val="accent1"/>
+          </a:effectRef>
+          <a:fontRef idx="minor">
+            <a:schemeClr val="lt1"/>
+          </a:fontRef>
+        </p:style>
+        <p:txBody>
+          <a:bodyPr rtlCol="0" anchor="ctr"/>
+          <a:lstStyle/>
+          <a:p>
+            <a:pPr algn="ctr"/>
+          </a:p>
+        </p:txBody>
+      </p:sp>
+      <p:sp>
+        <p:nvSpPr>
+          <p:cNvPr id="4" name="Rectangle 3"/>
+          <p:cNvSpPr/>
+          <p:nvPr/>
+        </p:nvSpPr>
+        <p:spPr>
+          <a:xfrm>
+            <a:off x="11649456" y="384048"/>
+            <a:ext cx="118872" cy="118872"/>
+          </a:xfrm>
+          <a:prstGeom prst="rect">
+            <a:avLst/>
+          </a:prstGeom>
+          <a:solidFill>
+            <a:srgbClr val="F97316"/>
+          </a:solidFill>
+          <a:ln>
+            <a:noFill/>
+          </a:ln>
+        </p:spPr>
+        <p:style>
+          <a:lnRef idx="1">
+            <a:schemeClr val="accent1"/>
+          </a:lnRef>
+          <a:fillRef idx="3">
+            <a:schemeClr val="accent1"/>
+          </a:fillRef>
+          <a:effectRef idx="2">
+            <a:schemeClr val="accent1"/>
+          </a:effectRef>
+          <a:fontRef idx="minor">
+            <a:schemeClr val="lt1"/>
+          </a:fontRef>
+        </p:style>
+        <p:txBody>
+          <a:bodyPr rtlCol="0" anchor="ctr"/>
+          <a:lstStyle/>
+          <a:p>
+            <a:pPr algn="ctr"/>
+          </a:p>
+        </p:txBody>
+      </p:sp>
+      <p:sp>
+        <p:nvSpPr>
+          <p:cNvPr id="5" name="TextBox 4"/>
+          <p:cNvSpPr txBox="1"/>
+          <p:nvPr/>
+        </p:nvSpPr>
+        <p:spPr>
+          <a:xfrm>
+            <a:off x="502920" y="6510528"/>
+            <a:ext cx="4572000" cy="274320"/>
+          </a:xfrm>
+          <a:prstGeom prst="rect">
+            <a:avLst/>
+          </a:prstGeom>
+          <a:noFill/>
+        </p:spPr>
+        <p:txBody>
+          <a:bodyPr wrap="none">
+            <a:spAutoFit/>
+          </a:bodyPr>
+          <a:lstStyle/>
+          <a:p>
+            <a:r>
+              <a:rPr sz="800" b="0">
+                <a:solidFill>
+                  <a:srgbClr val="8FA3BC"/>
+                </a:solidFill>
+                <a:latin typeface="Calibri"/>
+              </a:rPr>
+              <a:t>Vibe Coding  ·  June 26, 2026</a:t>
+            </a:r>
+          </a:p>
+        </p:txBody>
+      </p:sp>
+      <p:sp>
+        <p:nvSpPr>
+          <p:cNvPr id="6" name="TextBox 5"/>
+          <p:cNvSpPr txBox="1"/>
+          <p:nvPr/>
+        </p:nvSpPr>
+        <p:spPr>
+          <a:xfrm>
+            <a:off x="502920" y="292608"/>
+            <a:ext cx="8229600" cy="274320"/>
+          </a:xfrm>
+          <a:prstGeom prst="rect">
+            <a:avLst/>
+          </a:prstGeom>
+          <a:noFill/>
+        </p:spPr>
+        <p:txBody>
+          <a:bodyPr wrap="none">
+            <a:spAutoFit/>
+          </a:bodyPr>
+          <a:lstStyle/>
+          <a:p>
+            <a:r>
+              <a:rPr sz="1050" b="1">
+                <a:solidFill>
+                  <a:srgbClr val="0284C7"/>
+                </a:solidFill>
+                <a:latin typeface="Arial"/>
+              </a:rPr>
+              <a:t>FOUR DIMENSIONS</a:t>
+            </a:r>
+          </a:p>
+        </p:txBody>
+      </p:sp>
+      <p:sp>
+        <p:nvSpPr>
+          <p:cNvPr id="7" name="TextBox 6"/>
+          <p:cNvSpPr txBox="1"/>
+          <p:nvPr/>
+        </p:nvSpPr>
+        <p:spPr>
+          <a:xfrm>
+            <a:off x="502920" y="530352"/>
+            <a:ext cx="10241280" cy="640080"/>
+          </a:xfrm>
+          <a:prstGeom prst="rect">
+            <a:avLst/>
+          </a:prstGeom>
+          <a:noFill/>
+        </p:spPr>
+        <p:txBody>
+          <a:bodyPr wrap="none">
+            <a:spAutoFit/>
+          </a:bodyPr>
+          <a:lstStyle/>
+          <a:p>
+            <a:r>
+              <a:rPr sz="2700" b="0">
+                <a:solidFill>
+                  <a:srgbClr val="0F2740"/>
+                </a:solidFill>
+                <a:latin typeface="Arial Black"/>
+              </a:rPr>
+              <a:t>One Framework for Any Object</a:t>
+            </a:r>
+          </a:p>
+        </p:txBody>
+      </p:sp>
+      <p:graphicFrame>
+        <p:nvGraphicFramePr>
+          <p:cNvPr id="8" name="Table 7"/>
+          <p:cNvGraphicFramePr>
+            <a:graphicFrameLocks noGrp="1"/>
+          </p:cNvGraphicFramePr>
+          <p:nvPr/>
+        </p:nvGraphicFramePr>
+        <p:xfrm>
+          <a:off x="502920" y="1554480"/>
+          <a:ext cx="11155680" cy="3840480"/>
+        </p:xfrm>
+        <a:graphic>
+          <a:graphicData uri="http://schemas.openxmlformats.org/drawingml/2006/table">
+            <a:tbl>
+              <a:tblPr firstRow="1" bandRow="1">
+                <a:tableStyleId>{5C22544A-7EE6-4342-B048-85BDC9FD1C3A}</a:tableStyleId>
+              </a:tblPr>
+              <a:tblGrid>
+                <a:gridCol w="2286000"/>
+                <a:gridCol w="4114800"/>
+                <a:gridCol w="4754880"/>
+              </a:tblGrid>
+              <a:tr h="768096">
+                <a:tc>
+                  <a:txBody>
+                    <a:bodyPr/>
+                    <a:lstStyle/>
+                    <a:p>
+                      <a:r>
+                        <a:rPr sz="1200" b="1">
+                          <a:solidFill>
+                            <a:srgbClr val="0F2740"/>
+                          </a:solidFill>
+                          <a:latin typeface="Arial"/>
+                        </a:rPr>
+                        <a:t>Dimension</a:t>
+                      </a:r>
+                    </a:p>
+                  </a:txBody>
+                  <a:tcPr/>
+                </a:tc>
+                <a:tc>
+                  <a:txBody>
+                    <a:bodyPr/>
+                    <a:lstStyle/>
+                    <a:p>
+                      <a:r>
+                        <a:rPr sz="1200" b="1">
+                          <a:solidFill>
+                            <a:srgbClr val="0F2740"/>
+                          </a:solidFill>
+                          <a:latin typeface="Arial"/>
+                        </a:rPr>
+                        <a:t>Question</a:t>
+                      </a:r>
+                    </a:p>
+                  </a:txBody>
+                  <a:tcPr/>
+                </a:tc>
+                <a:tc>
+                  <a:txBody>
+                    <a:bodyPr/>
+                    <a:lstStyle/>
+                    <a:p>
+                      <a:r>
+                        <a:rPr sz="1200" b="1">
+                          <a:solidFill>
+                            <a:srgbClr val="0F2740"/>
+                          </a:solidFill>
+                          <a:latin typeface="Arial"/>
+                        </a:rPr>
+                        <a:t>House example</a:t>
+                      </a:r>
+                    </a:p>
+                  </a:txBody>
+                  <a:tcPr/>
+                </a:tc>
+              </a:tr>
+              <a:tr h="768096">
+                <a:tc>
+                  <a:txBody>
+                    <a:bodyPr/>
+                    <a:lstStyle/>
+                    <a:p>
+                      <a:r>
+                        <a:rPr sz="1150" b="1">
+                          <a:solidFill>
+                            <a:srgbClr val="0284C7"/>
+                          </a:solidFill>
+                          <a:latin typeface="Calibri"/>
+                        </a:rPr>
+                        <a:t>Asset</a:t>
+                      </a:r>
+                    </a:p>
+                  </a:txBody>
+                  <a:tcPr/>
+                </a:tc>
+                <a:tc>
+                  <a:txBody>
+                    <a:bodyPr/>
+                    <a:lstStyle/>
+                    <a:p>
+                      <a:r>
+                        <a:rPr sz="1150" b="0">
+                          <a:solidFill>
+                            <a:srgbClr val="47566B"/>
+                          </a:solidFill>
+                          <a:latin typeface="Calibri"/>
+                        </a:rPr>
+                        <a:t>What resources?</a:t>
+                      </a:r>
+                    </a:p>
+                  </a:txBody>
+                  <a:tcPr/>
+                </a:tc>
+                <a:tc>
+                  <a:txBody>
+                    <a:bodyPr/>
+                    <a:lstStyle/>
+                    <a:p>
+                      <a:r>
+                        <a:rPr sz="1150" b="0">
+                          <a:solidFill>
+                            <a:srgbClr val="47566B"/>
+                          </a:solidFill>
+                          <a:latin typeface="Calibri"/>
+                        </a:rPr>
+                        <a:t>Wall/door/window meshes, materials, SFX</a:t>
+                      </a:r>
+                    </a:p>
+                  </a:txBody>
+                  <a:tcPr/>
+                </a:tc>
+              </a:tr>
+              <a:tr h="768096">
+                <a:tc>
+                  <a:txBody>
+                    <a:bodyPr/>
+                    <a:lstStyle/>
+                    <a:p>
+                      <a:r>
+                        <a:rPr sz="1150" b="1">
+                          <a:solidFill>
+                            <a:srgbClr val="0284C7"/>
+                          </a:solidFill>
+                          <a:latin typeface="Calibri"/>
+                        </a:rPr>
+                        <a:t>Behavior</a:t>
+                      </a:r>
+                    </a:p>
+                  </a:txBody>
+                  <a:tcPr/>
+                </a:tc>
+                <a:tc>
+                  <a:txBody>
+                    <a:bodyPr/>
+                    <a:lstStyle/>
+                    <a:p>
+                      <a:r>
+                        <a:rPr sz="1150" b="0">
+                          <a:solidFill>
+                            <a:srgbClr val="47566B"/>
+                          </a:solidFill>
+                          <a:latin typeface="Calibri"/>
+                        </a:rPr>
+                        <a:t>What does it do?</a:t>
+                      </a:r>
+                    </a:p>
+                  </a:txBody>
+                  <a:tcPr/>
+                </a:tc>
+                <a:tc>
+                  <a:txBody>
+                    <a:bodyPr/>
+                    <a:lstStyle/>
+                    <a:p>
+                      <a:r>
+                        <a:rPr sz="1150" b="0">
+                          <a:solidFill>
+                            <a:srgbClr val="47566B"/>
+                          </a:solidFill>
+                          <a:latin typeface="Calibri"/>
+                        </a:rPr>
+                        <a:t>Place, upgrade, take damage, demolish</a:t>
+                      </a:r>
+                    </a:p>
+                  </a:txBody>
+                  <a:tcPr/>
+                </a:tc>
+              </a:tr>
+              <a:tr h="768096">
+                <a:tc>
+                  <a:txBody>
+                    <a:bodyPr/>
+                    <a:lstStyle/>
+                    <a:p>
+                      <a:r>
+                        <a:rPr sz="1150" b="1">
+                          <a:solidFill>
+                            <a:srgbClr val="0284C7"/>
+                          </a:solidFill>
+                          <a:latin typeface="Calibri"/>
+                        </a:rPr>
+                        <a:t>Data</a:t>
+                      </a:r>
+                    </a:p>
+                  </a:txBody>
+                  <a:tcPr/>
+                </a:tc>
+                <a:tc>
+                  <a:txBody>
+                    <a:bodyPr/>
+                    <a:lstStyle/>
+                    <a:p>
+                      <a:r>
+                        <a:rPr sz="1150" b="0">
+                          <a:solidFill>
+                            <a:srgbClr val="47566B"/>
+                          </a:solidFill>
+                          <a:latin typeface="Calibri"/>
+                        </a:rPr>
+                        <a:t>What properties?</a:t>
+                      </a:r>
+                    </a:p>
+                  </a:txBody>
+                  <a:tcPr/>
+                </a:tc>
+                <a:tc>
+                  <a:txBody>
+                    <a:bodyPr/>
+                    <a:lstStyle/>
+                    <a:p>
+                      <a:r>
+                        <a:rPr sz="1150" b="0">
+                          <a:solidFill>
+                            <a:srgbClr val="47566B"/>
+                          </a:solidFill>
+                          <a:latin typeface="Calibri"/>
+                        </a:rPr>
+                        <a:t>HP, material cost, size, insulation</a:t>
+                      </a:r>
+                    </a:p>
+                  </a:txBody>
+                  <a:tcPr/>
+                </a:tc>
+              </a:tr>
+              <a:tr h="768096">
+                <a:tc>
+                  <a:txBody>
+                    <a:bodyPr/>
+                    <a:lstStyle/>
+                    <a:p>
+                      <a:r>
+                        <a:rPr sz="1150" b="1">
+                          <a:solidFill>
+                            <a:srgbClr val="0284C7"/>
+                          </a:solidFill>
+                          <a:latin typeface="Calibri"/>
+                        </a:rPr>
+                        <a:t>Interaction</a:t>
+                      </a:r>
+                    </a:p>
+                  </a:txBody>
+                  <a:tcPr/>
+                </a:tc>
+                <a:tc>
+                  <a:txBody>
+                    <a:bodyPr/>
+                    <a:lstStyle/>
+                    <a:p>
+                      <a:r>
+                        <a:rPr sz="1150" b="0">
+                          <a:solidFill>
+                            <a:srgbClr val="47566B"/>
+                          </a:solidFill>
+                          <a:latin typeface="Calibri"/>
+                        </a:rPr>
+                        <a:t>Who touches it?</a:t>
+                      </a:r>
+                    </a:p>
+                  </a:txBody>
+                  <a:tcPr/>
+                </a:tc>
+                <a:tc>
+                  <a:txBody>
+                    <a:bodyPr/>
+                    <a:lstStyle/>
+                    <a:p>
+                      <a:r>
+                        <a:rPr sz="1150" b="0">
+                          <a:solidFill>
+                            <a:srgbClr val="47566B"/>
+                          </a:solidFill>
+                          <a:latin typeface="Calibri"/>
+                        </a:rPr>
+                        <a:t>Player builds, NPC uses, weather, save</a:t>
+                      </a:r>
+                    </a:p>
+                  </a:txBody>
+                  <a:tcPr/>
+                </a:tc>
+              </a:tr>
+            </a:tbl>
+          </a:graphicData>
+        </a:graphic>
+      </p:graphicFrame>
+      <p:sp>
+        <p:nvSpPr>
+          <p:cNvPr id="9" name="TextBox 8"/>
+          <p:cNvSpPr txBox="1"/>
+          <p:nvPr/>
+        </p:nvSpPr>
+        <p:spPr>
+          <a:xfrm>
+            <a:off x="502920" y="5669280"/>
+            <a:ext cx="11155680" cy="320040"/>
+          </a:xfrm>
+          <a:prstGeom prst="rect">
+            <a:avLst/>
+          </a:prstGeom>
+          <a:noFill/>
+        </p:spPr>
+        <p:txBody>
+          <a:bodyPr wrap="none">
+            <a:spAutoFit/>
+          </a:bodyPr>
+          <a:lstStyle/>
+          <a:p>
+            <a:r>
+              <a:rPr sz="1250" b="1">
+                <a:solidFill>
+                  <a:srgbClr val="F97316"/>
+                </a:solidFill>
+                <a:latin typeface="Calibri"/>
+              </a:rPr>
+              <a:t>Systems → objects → assets &amp; behavior → </a:t>
+            </a:r>
+            <a:r>
+              <a:rPr sz="1250" b="0">
+                <a:solidFill>
+                  <a:srgbClr val="47566B"/>
+                </a:solidFill>
+                <a:latin typeface="Calibri"/>
+              </a:rPr>
+              <a:t>tasks you can actually schedule.</a:t>
+            </a:r>
+          </a:p>
+        </p:txBody>
+      </p:sp>
+    </p:spTree>
+  </p:cSld>
+  <p:clrMapOvr>
+    <a:masterClrMapping/>
+  </p:clrMapOvr>
+</p:sld>
+</file>
+
+<file path=ppt/slides/slide11.xml><?xml version="1.0" encoding="utf-8"?>
+<p:sld xmlns:a="http://schemas.openxmlformats.org/drawingml/2006/main" xmlns:p="http://schemas.openxmlformats.org/presentationml/2006/main" xmlns:r="http://schemas.openxmlformats.org/officeDocument/2006/relationships">
+  <p:cSld>
+    <p:spTree>
+      <p:nvGrpSpPr>
+        <p:cNvPr id="1" name=""/>
+        <p:cNvGrpSpPr/>
+        <p:nvPr/>
+      </p:nvGrpSpPr>
+      <p:grpSpPr/>
+      <p:sp>
+        <p:nvSpPr>
+          <p:cNvPr id="2" name="Rectangle 1"/>
+          <p:cNvSpPr/>
+          <p:nvPr/>
+        </p:nvSpPr>
+        <p:spPr>
+          <a:xfrm>
+            <a:off x="0" y="0"/>
+            <a:ext cx="12191695" cy="6858000"/>
+          </a:xfrm>
+          <a:prstGeom prst="rect">
+            <a:avLst/>
+          </a:prstGeom>
+          <a:solidFill>
+            <a:srgbClr val="F4F8FC"/>
+          </a:solidFill>
+          <a:ln>
+            <a:noFill/>
+          </a:ln>
+        </p:spPr>
+        <p:style>
+          <a:lnRef idx="1">
+            <a:schemeClr val="accent1"/>
+          </a:lnRef>
+          <a:fillRef idx="3">
+            <a:schemeClr val="accent1"/>
+          </a:fillRef>
+          <a:effectRef idx="2">
+            <a:schemeClr val="accent1"/>
+          </a:effectRef>
+          <a:fontRef idx="minor">
+            <a:schemeClr val="lt1"/>
+          </a:fontRef>
+        </p:style>
+        <p:txBody>
+          <a:bodyPr rtlCol="0" anchor="ctr"/>
+          <a:lstStyle/>
+          <a:p>
+            <a:pPr algn="ctr"/>
+          </a:p>
+        </p:txBody>
+      </p:sp>
+      <p:sp>
+        <p:nvSpPr>
+          <p:cNvPr id="3" name="Rectangle 2"/>
+          <p:cNvSpPr/>
+          <p:nvPr/>
+        </p:nvSpPr>
+        <p:spPr>
+          <a:xfrm>
+            <a:off x="11475720" y="384048"/>
+            <a:ext cx="118872" cy="118872"/>
+          </a:xfrm>
+          <a:prstGeom prst="rect">
+            <a:avLst/>
+          </a:prstGeom>
+          <a:solidFill>
+            <a:srgbClr val="0EA5E9"/>
+          </a:solidFill>
+          <a:ln>
+            <a:noFill/>
+          </a:ln>
+        </p:spPr>
+        <p:style>
+          <a:lnRef idx="1">
+            <a:schemeClr val="accent1"/>
+          </a:lnRef>
+          <a:fillRef idx="3">
+            <a:schemeClr val="accent1"/>
+          </a:fillRef>
+          <a:effectRef idx="2">
+            <a:schemeClr val="accent1"/>
+          </a:effectRef>
+          <a:fontRef idx="minor">
+            <a:schemeClr val="lt1"/>
+          </a:fontRef>
+        </p:style>
+        <p:txBody>
+          <a:bodyPr rtlCol="0" anchor="ctr"/>
+          <a:lstStyle/>
+          <a:p>
+            <a:pPr algn="ctr"/>
+          </a:p>
+        </p:txBody>
+      </p:sp>
+      <p:sp>
+        <p:nvSpPr>
+          <p:cNvPr id="4" name="Rectangle 3"/>
+          <p:cNvSpPr/>
+          <p:nvPr/>
+        </p:nvSpPr>
+        <p:spPr>
+          <a:xfrm>
+            <a:off x="11649456" y="384048"/>
+            <a:ext cx="118872" cy="118872"/>
+          </a:xfrm>
+          <a:prstGeom prst="rect">
+            <a:avLst/>
+          </a:prstGeom>
+          <a:solidFill>
+            <a:srgbClr val="F97316"/>
+          </a:solidFill>
+          <a:ln>
+            <a:noFill/>
+          </a:ln>
+        </p:spPr>
+        <p:style>
+          <a:lnRef idx="1">
+            <a:schemeClr val="accent1"/>
+          </a:lnRef>
+          <a:fillRef idx="3">
+            <a:schemeClr val="accent1"/>
+          </a:fillRef>
+          <a:effectRef idx="2">
+            <a:schemeClr val="accent1"/>
+          </a:effectRef>
+          <a:fontRef idx="minor">
+            <a:schemeClr val="lt1"/>
+          </a:fontRef>
+        </p:style>
+        <p:txBody>
+          <a:bodyPr rtlCol="0" anchor="ctr"/>
+          <a:lstStyle/>
+          <a:p>
+            <a:pPr algn="ctr"/>
+          </a:p>
+        </p:txBody>
+      </p:sp>
+      <p:sp>
+        <p:nvSpPr>
+          <p:cNvPr id="5" name="TextBox 4"/>
+          <p:cNvSpPr txBox="1"/>
+          <p:nvPr/>
+        </p:nvSpPr>
+        <p:spPr>
+          <a:xfrm>
+            <a:off x="502920" y="6510528"/>
+            <a:ext cx="4572000" cy="274320"/>
+          </a:xfrm>
+          <a:prstGeom prst="rect">
+            <a:avLst/>
+          </a:prstGeom>
+          <a:noFill/>
+        </p:spPr>
+        <p:txBody>
+          <a:bodyPr wrap="none">
+            <a:spAutoFit/>
+          </a:bodyPr>
+          <a:lstStyle/>
+          <a:p>
+            <a:r>
+              <a:rPr sz="800" b="0">
+                <a:solidFill>
+                  <a:srgbClr val="8FA3BC"/>
+                </a:solidFill>
+                <a:latin typeface="Calibri"/>
+              </a:rPr>
+              <a:t>Vibe Coding  ·  June 26, 2026</a:t>
+            </a:r>
+          </a:p>
+        </p:txBody>
+      </p:sp>
+      <p:sp>
+        <p:nvSpPr>
+          <p:cNvPr id="6" name="TextBox 5"/>
+          <p:cNvSpPr txBox="1"/>
+          <p:nvPr/>
+        </p:nvSpPr>
+        <p:spPr>
+          <a:xfrm>
+            <a:off x="502920" y="292608"/>
+            <a:ext cx="8229600" cy="274320"/>
+          </a:xfrm>
+          <a:prstGeom prst="rect">
+            <a:avLst/>
+          </a:prstGeom>
+          <a:noFill/>
+        </p:spPr>
+        <p:txBody>
+          <a:bodyPr wrap="none">
+            <a:spAutoFit/>
+          </a:bodyPr>
+          <a:lstStyle/>
+          <a:p>
+            <a:r>
+              <a:rPr sz="1050" b="1">
+                <a:solidFill>
+                  <a:srgbClr val="0284C7"/>
+                </a:solidFill>
+                <a:latin typeface="Arial"/>
+              </a:rPr>
+              <a:t>PUT IT TOGETHER</a:t>
+            </a:r>
+          </a:p>
+        </p:txBody>
+      </p:sp>
+      <p:sp>
+        <p:nvSpPr>
+          <p:cNvPr id="7" name="TextBox 6"/>
+          <p:cNvSpPr txBox="1"/>
+          <p:nvPr/>
+        </p:nvSpPr>
+        <p:spPr>
+          <a:xfrm>
+            <a:off x="502920" y="530352"/>
+            <a:ext cx="10241280" cy="640080"/>
+          </a:xfrm>
+          <a:prstGeom prst="rect">
+            <a:avLst/>
+          </a:prstGeom>
+          <a:noFill/>
+        </p:spPr>
+        <p:txBody>
+          <a:bodyPr wrap="none">
+            <a:spAutoFit/>
+          </a:bodyPr>
+          <a:lstStyle/>
+          <a:p>
+            <a:r>
+              <a:rPr sz="2700" b="0">
+                <a:solidFill>
+                  <a:srgbClr val="0F2740"/>
+                </a:solidFill>
+                <a:latin typeface="Arial Black"/>
+              </a:rPr>
+              <a:t>From Vision to a Task Tree</a:t>
+            </a:r>
+          </a:p>
+        </p:txBody>
+      </p:sp>
+      <p:sp>
+        <p:nvSpPr>
+          <p:cNvPr id="8" name="Rectangle 7"/>
+          <p:cNvSpPr/>
+          <p:nvPr/>
+        </p:nvSpPr>
+        <p:spPr>
+          <a:xfrm>
+            <a:off x="502920" y="1500000"/>
+            <a:ext cx="457200" cy="457200"/>
+          </a:xfrm>
+          <a:prstGeom prst="rect">
+            <a:avLst/>
+          </a:prstGeom>
+          <a:solidFill>
+            <a:srgbClr val="0EA5E9"/>
+          </a:solidFill>
+          <a:ln>
+            <a:noFill/>
+          </a:ln>
+        </p:spPr>
+        <p:style>
+          <a:lnRef idx="1">
+            <a:schemeClr val="accent1"/>
+          </a:lnRef>
+          <a:fillRef idx="3">
+            <a:schemeClr val="accent1"/>
+          </a:fillRef>
+          <a:effectRef idx="2">
+            <a:schemeClr val="accent1"/>
+          </a:effectRef>
+          <a:fontRef idx="minor">
+            <a:schemeClr val="lt1"/>
+          </a:fontRef>
+        </p:style>
+        <p:txBody>
+          <a:bodyPr rtlCol="0" anchor="ctr"/>
+          <a:lstStyle/>
+          <a:p>
+            <a:pPr algn="ctr"/>
+            <a:r>
+              <a:rPr sz="1600" b="0">
+                <a:solidFill>
+                  <a:srgbClr val="FFFFFF"/>
+                </a:solidFill>
+                <a:latin typeface="Arial Black"/>
+              </a:rPr>
+              <a:t>1</a:t>
+            </a:r>
+          </a:p>
+        </p:txBody>
+      </p:sp>
+      <p:sp>
+        <p:nvSpPr>
+          <p:cNvPr id="9" name="TextBox 8"/>
+          <p:cNvSpPr txBox="1"/>
+          <p:nvPr/>
+        </p:nvSpPr>
+        <p:spPr>
+          <a:xfrm>
+            <a:off x="1188720" y="1500000"/>
+            <a:ext cx="2743200" cy="365760"/>
+          </a:xfrm>
+          <a:prstGeom prst="rect">
+            <a:avLst/>
+          </a:prstGeom>
+          <a:noFill/>
+        </p:spPr>
+        <p:txBody>
+          <a:bodyPr wrap="none">
+            <a:spAutoFit/>
+          </a:bodyPr>
+          <a:lstStyle/>
+          <a:p>
+            <a:r>
+              <a:rPr sz="1600" b="0">
+                <a:solidFill>
+                  <a:srgbClr val="0F2740"/>
+                </a:solidFill>
+                <a:latin typeface="Arial Black"/>
+              </a:rPr>
+              <a:t>Vision</a:t>
+            </a:r>
+          </a:p>
+        </p:txBody>
+      </p:sp>
+      <p:sp>
+        <p:nvSpPr>
+          <p:cNvPr id="10" name="TextBox 9"/>
+          <p:cNvSpPr txBox="1"/>
+          <p:nvPr/>
+        </p:nvSpPr>
+        <p:spPr>
+          <a:xfrm>
+            <a:off x="4114800" y="1500000"/>
+            <a:ext cx="7559040" cy="365760"/>
+          </a:xfrm>
+          <a:prstGeom prst="rect">
+            <a:avLst/>
+          </a:prstGeom>
+          <a:noFill/>
+        </p:spPr>
+        <p:txBody>
+          <a:bodyPr wrap="none">
+            <a:spAutoFit/>
+          </a:bodyPr>
+          <a:lstStyle/>
+          <a:p>
+            <a:r>
+              <a:rPr sz="1350" b="0">
+                <a:solidFill>
+                  <a:srgbClr val="47566B"/>
+                </a:solidFill>
+                <a:latin typeface="Calibri"/>
+              </a:rPr>
+              <a:t>One sentence. Never refine it into a spec.</a:t>
+            </a:r>
+          </a:p>
+        </p:txBody>
+      </p:sp>
+      <p:sp>
+        <p:nvSpPr>
+          <p:cNvPr id="11" name="Rectangle 10"/>
+          <p:cNvSpPr/>
+          <p:nvPr/>
+        </p:nvSpPr>
+        <p:spPr>
+          <a:xfrm>
+            <a:off x="502920" y="2140080"/>
+            <a:ext cx="457200" cy="457200"/>
+          </a:xfrm>
+          <a:prstGeom prst="rect">
+            <a:avLst/>
+          </a:prstGeom>
+          <a:solidFill>
+            <a:srgbClr val="0EA5E9"/>
+          </a:solidFill>
+          <a:ln>
+            <a:noFill/>
+          </a:ln>
+        </p:spPr>
+        <p:style>
+          <a:lnRef idx="1">
+            <a:schemeClr val="accent1"/>
+          </a:lnRef>
+          <a:fillRef idx="3">
+            <a:schemeClr val="accent1"/>
+          </a:fillRef>
+          <a:effectRef idx="2">
+            <a:schemeClr val="accent1"/>
+          </a:effectRef>
+          <a:fontRef idx="minor">
+            <a:schemeClr val="lt1"/>
+          </a:fontRef>
+        </p:style>
+        <p:txBody>
+          <a:bodyPr rtlCol="0" anchor="ctr"/>
+          <a:lstStyle/>
+          <a:p>
+            <a:pPr algn="ctr"/>
+            <a:r>
+              <a:rPr sz="1600" b="0">
+                <a:solidFill>
+                  <a:srgbClr val="FFFFFF"/>
+                </a:solidFill>
+                <a:latin typeface="Arial Black"/>
+              </a:rPr>
+              <a:t>2</a:t>
+            </a:r>
+          </a:p>
+        </p:txBody>
+      </p:sp>
+      <p:sp>
+        <p:nvSpPr>
+          <p:cNvPr id="12" name="TextBox 11"/>
+          <p:cNvSpPr txBox="1"/>
+          <p:nvPr/>
+        </p:nvSpPr>
+        <p:spPr>
+          <a:xfrm>
+            <a:off x="1188720" y="2140080"/>
+            <a:ext cx="2743200" cy="365760"/>
+          </a:xfrm>
+          <a:prstGeom prst="rect">
+            <a:avLst/>
+          </a:prstGeom>
+          <a:noFill/>
+        </p:spPr>
+        <p:txBody>
+          <a:bodyPr wrap="none">
+            <a:spAutoFit/>
+          </a:bodyPr>
+          <a:lstStyle/>
+          <a:p>
+            <a:r>
+              <a:rPr sz="1600" b="0">
+                <a:solidFill>
+                  <a:srgbClr val="0F2740"/>
+                </a:solidFill>
+                <a:latin typeface="Arial Black"/>
+              </a:rPr>
+              <a:t>Core loop</a:t>
+            </a:r>
+          </a:p>
+        </p:txBody>
+      </p:sp>
+      <p:sp>
+        <p:nvSpPr>
+          <p:cNvPr id="13" name="TextBox 12"/>
+          <p:cNvSpPr txBox="1"/>
+          <p:nvPr/>
+        </p:nvSpPr>
+        <p:spPr>
+          <a:xfrm>
+            <a:off x="4114800" y="2140080"/>
+            <a:ext cx="7559040" cy="365760"/>
+          </a:xfrm>
+          <a:prstGeom prst="rect">
+            <a:avLst/>
+          </a:prstGeom>
+          <a:noFill/>
+        </p:spPr>
+        <p:txBody>
+          <a:bodyPr wrap="none">
+            <a:spAutoFit/>
+          </a:bodyPr>
+          <a:lstStyle/>
+          <a:p>
+            <a:r>
+              <a:rPr sz="1350" b="0">
+                <a:solidFill>
+                  <a:srgbClr val="47566B"/>
+                </a:solidFill>
+                <a:latin typeface="Calibri"/>
+              </a:rPr>
+              <a:t>Explore → gather → craft → build → repeat.</a:t>
+            </a:r>
+          </a:p>
+        </p:txBody>
+      </p:sp>
+      <p:sp>
+        <p:nvSpPr>
+          <p:cNvPr id="14" name="Rectangle 13"/>
+          <p:cNvSpPr/>
+          <p:nvPr/>
+        </p:nvSpPr>
+        <p:spPr>
+          <a:xfrm>
+            <a:off x="502920" y="2780160"/>
+            <a:ext cx="457200" cy="457200"/>
+          </a:xfrm>
+          <a:prstGeom prst="rect">
+            <a:avLst/>
+          </a:prstGeom>
+          <a:solidFill>
+            <a:srgbClr val="0EA5E9"/>
+          </a:solidFill>
+          <a:ln>
+            <a:noFill/>
+          </a:ln>
+        </p:spPr>
+        <p:style>
+          <a:lnRef idx="1">
+            <a:schemeClr val="accent1"/>
+          </a:lnRef>
+          <a:fillRef idx="3">
+            <a:schemeClr val="accent1"/>
+          </a:fillRef>
+          <a:effectRef idx="2">
+            <a:schemeClr val="accent1"/>
+          </a:effectRef>
+          <a:fontRef idx="minor">
+            <a:schemeClr val="lt1"/>
+          </a:fontRef>
+        </p:style>
+        <p:txBody>
+          <a:bodyPr rtlCol="0" anchor="ctr"/>
+          <a:lstStyle/>
+          <a:p>
+            <a:pPr algn="ctr"/>
+            <a:r>
+              <a:rPr sz="1600" b="0">
+                <a:solidFill>
+                  <a:srgbClr val="FFFFFF"/>
+                </a:solidFill>
+                <a:latin typeface="Arial Black"/>
+              </a:rPr>
+              <a:t>3</a:t>
+            </a:r>
+          </a:p>
+        </p:txBody>
+      </p:sp>
+      <p:sp>
+        <p:nvSpPr>
+          <p:cNvPr id="15" name="TextBox 14"/>
+          <p:cNvSpPr txBox="1"/>
+          <p:nvPr/>
+        </p:nvSpPr>
+        <p:spPr>
+          <a:xfrm>
+            <a:off x="1188720" y="2780160"/>
+            <a:ext cx="2743200" cy="365760"/>
+          </a:xfrm>
+          <a:prstGeom prst="rect">
+            <a:avLst/>
+          </a:prstGeom>
+          <a:noFill/>
+        </p:spPr>
+        <p:txBody>
+          <a:bodyPr wrap="none">
+            <a:spAutoFit/>
+          </a:bodyPr>
+          <a:lstStyle/>
+          <a:p>
+            <a:r>
+              <a:rPr sz="1600" b="0">
+                <a:solidFill>
+                  <a:srgbClr val="0F2740"/>
+                </a:solidFill>
+                <a:latin typeface="Arial Black"/>
+              </a:rPr>
+              <a:t>Systems</a:t>
+            </a:r>
+          </a:p>
+        </p:txBody>
+      </p:sp>
+      <p:sp>
+        <p:nvSpPr>
+          <p:cNvPr id="16" name="TextBox 15"/>
+          <p:cNvSpPr txBox="1"/>
+          <p:nvPr/>
+        </p:nvSpPr>
+        <p:spPr>
+          <a:xfrm>
+            <a:off x="4114800" y="2780160"/>
+            <a:ext cx="7559040" cy="365760"/>
+          </a:xfrm>
+          <a:prstGeom prst="rect">
+            <a:avLst/>
+          </a:prstGeom>
+          <a:noFill/>
+        </p:spPr>
+        <p:txBody>
+          <a:bodyPr wrap="none">
+            <a:spAutoFit/>
+          </a:bodyPr>
+          <a:lstStyle/>
+          <a:p>
+            <a:r>
+              <a:rPr sz="1350" b="0">
+                <a:solidFill>
+                  <a:srgbClr val="47566B"/>
+                </a:solidFill>
+                <a:latin typeface="Calibri"/>
+              </a:rPr>
+              <a:t>World, Player, Building, Crafting, Survival, AI, UI, Save.</a:t>
+            </a:r>
+          </a:p>
+        </p:txBody>
+      </p:sp>
+      <p:sp>
+        <p:nvSpPr>
+          <p:cNvPr id="17" name="Rectangle 16"/>
+          <p:cNvSpPr/>
+          <p:nvPr/>
+        </p:nvSpPr>
+        <p:spPr>
+          <a:xfrm>
+            <a:off x="502920" y="3420240"/>
+            <a:ext cx="457200" cy="457200"/>
+          </a:xfrm>
+          <a:prstGeom prst="rect">
+            <a:avLst/>
+          </a:prstGeom>
+          <a:solidFill>
+            <a:srgbClr val="0EA5E9"/>
+          </a:solidFill>
+          <a:ln>
+            <a:noFill/>
+          </a:ln>
+        </p:spPr>
+        <p:style>
+          <a:lnRef idx="1">
+            <a:schemeClr val="accent1"/>
+          </a:lnRef>
+          <a:fillRef idx="3">
+            <a:schemeClr val="accent1"/>
+          </a:fillRef>
+          <a:effectRef idx="2">
+            <a:schemeClr val="accent1"/>
+          </a:effectRef>
+          <a:fontRef idx="minor">
+            <a:schemeClr val="lt1"/>
+          </a:fontRef>
+        </p:style>
+        <p:txBody>
+          <a:bodyPr rtlCol="0" anchor="ctr"/>
+          <a:lstStyle/>
+          <a:p>
+            <a:pPr algn="ctr"/>
+            <a:r>
+              <a:rPr sz="1600" b="0">
+                <a:solidFill>
+                  <a:srgbClr val="FFFFFF"/>
+                </a:solidFill>
+                <a:latin typeface="Arial Black"/>
+              </a:rPr>
+              <a:t>4</a:t>
+            </a:r>
+          </a:p>
+        </p:txBody>
+      </p:sp>
+      <p:sp>
+        <p:nvSpPr>
+          <p:cNvPr id="18" name="TextBox 17"/>
+          <p:cNvSpPr txBox="1"/>
+          <p:nvPr/>
+        </p:nvSpPr>
+        <p:spPr>
+          <a:xfrm>
+            <a:off x="1188720" y="3420240"/>
+            <a:ext cx="2743200" cy="365760"/>
+          </a:xfrm>
+          <a:prstGeom prst="rect">
+            <a:avLst/>
+          </a:prstGeom>
+          <a:noFill/>
+        </p:spPr>
+        <p:txBody>
+          <a:bodyPr wrap="none">
+            <a:spAutoFit/>
+          </a:bodyPr>
+          <a:lstStyle/>
+          <a:p>
+            <a:r>
+              <a:rPr sz="1600" b="0">
+                <a:solidFill>
+                  <a:srgbClr val="0F2740"/>
+                </a:solidFill>
+                <a:latin typeface="Arial Black"/>
+              </a:rPr>
+              <a:t>Modules</a:t>
+            </a:r>
+          </a:p>
+        </p:txBody>
+      </p:sp>
+      <p:sp>
+        <p:nvSpPr>
+          <p:cNvPr id="19" name="TextBox 18"/>
+          <p:cNvSpPr txBox="1"/>
+          <p:nvPr/>
+        </p:nvSpPr>
+        <p:spPr>
+          <a:xfrm>
+            <a:off x="4114800" y="3420240"/>
+            <a:ext cx="7559040" cy="365760"/>
+          </a:xfrm>
+          <a:prstGeom prst="rect">
+            <a:avLst/>
+          </a:prstGeom>
+          <a:noFill/>
+        </p:spPr>
+        <p:txBody>
+          <a:bodyPr wrap="none">
+            <a:spAutoFit/>
+          </a:bodyPr>
+          <a:lstStyle/>
+          <a:p>
+            <a:r>
+              <a:rPr sz="1350" b="0">
+                <a:solidFill>
+                  <a:srgbClr val="47566B"/>
+                </a:solidFill>
+                <a:latin typeface="Calibri"/>
+              </a:rPr>
+              <a:t>Building → Wall → mesh, material, collision, placement…</a:t>
+            </a:r>
+          </a:p>
+        </p:txBody>
+      </p:sp>
+      <p:sp>
+        <p:nvSpPr>
+          <p:cNvPr id="20" name="Rectangle 19"/>
+          <p:cNvSpPr/>
+          <p:nvPr/>
+        </p:nvSpPr>
+        <p:spPr>
+          <a:xfrm>
+            <a:off x="502920" y="4060320"/>
+            <a:ext cx="457200" cy="457200"/>
+          </a:xfrm>
+          <a:prstGeom prst="rect">
+            <a:avLst/>
+          </a:prstGeom>
+          <a:solidFill>
+            <a:srgbClr val="0EA5E9"/>
+          </a:solidFill>
+          <a:ln>
+            <a:noFill/>
+          </a:ln>
+        </p:spPr>
+        <p:style>
+          <a:lnRef idx="1">
+            <a:schemeClr val="accent1"/>
+          </a:lnRef>
+          <a:fillRef idx="3">
+            <a:schemeClr val="accent1"/>
+          </a:fillRef>
+          <a:effectRef idx="2">
+            <a:schemeClr val="accent1"/>
+          </a:effectRef>
+          <a:fontRef idx="minor">
+            <a:schemeClr val="lt1"/>
+          </a:fontRef>
+        </p:style>
+        <p:txBody>
+          <a:bodyPr rtlCol="0" anchor="ctr"/>
+          <a:lstStyle/>
+          <a:p>
+            <a:pPr algn="ctr"/>
+            <a:r>
+              <a:rPr sz="1600" b="0">
+                <a:solidFill>
+                  <a:srgbClr val="FFFFFF"/>
+                </a:solidFill>
+                <a:latin typeface="Arial Black"/>
+              </a:rPr>
+              <a:t>5</a:t>
+            </a:r>
+          </a:p>
+        </p:txBody>
+      </p:sp>
+      <p:sp>
+        <p:nvSpPr>
+          <p:cNvPr id="21" name="TextBox 20"/>
+          <p:cNvSpPr txBox="1"/>
+          <p:nvPr/>
+        </p:nvSpPr>
+        <p:spPr>
+          <a:xfrm>
+            <a:off x="1188720" y="4060320"/>
+            <a:ext cx="2743200" cy="365760"/>
+          </a:xfrm>
+          <a:prstGeom prst="rect">
+            <a:avLst/>
+          </a:prstGeom>
+          <a:noFill/>
+        </p:spPr>
+        <p:txBody>
+          <a:bodyPr wrap="none">
+            <a:spAutoFit/>
+          </a:bodyPr>
+          <a:lstStyle/>
+          <a:p>
+            <a:r>
+              <a:rPr sz="1600" b="0">
+                <a:solidFill>
+                  <a:srgbClr val="0F2740"/>
+                </a:solidFill>
+                <a:latin typeface="Arial Black"/>
+              </a:rPr>
+              <a:t>Tasks</a:t>
+            </a:r>
+          </a:p>
+        </p:txBody>
+      </p:sp>
+      <p:sp>
+        <p:nvSpPr>
+          <p:cNvPr id="22" name="TextBox 21"/>
+          <p:cNvSpPr txBox="1"/>
+          <p:nvPr/>
+        </p:nvSpPr>
+        <p:spPr>
+          <a:xfrm>
+            <a:off x="4114800" y="4060320"/>
+            <a:ext cx="7559040" cy="365760"/>
+          </a:xfrm>
+          <a:prstGeom prst="rect">
+            <a:avLst/>
+          </a:prstGeom>
+          <a:noFill/>
+        </p:spPr>
+        <p:txBody>
+          <a:bodyPr wrap="none">
+            <a:spAutoFit/>
+          </a:bodyPr>
+          <a:lstStyle/>
+          <a:p>
+            <a:r>
+              <a:rPr sz="1350" b="0">
+                <a:solidFill>
+                  <a:srgbClr val="47566B"/>
+                </a:solidFill>
+                <a:latin typeface="Calibri"/>
+              </a:rPr>
+              <a:t>Each leaf: one output, one test, one session.</a:t>
+            </a:r>
+          </a:p>
+        </p:txBody>
+      </p:sp>
+      <p:sp>
+        <p:nvSpPr>
+          <p:cNvPr id="23" name="Rectangle 22"/>
+          <p:cNvSpPr/>
+          <p:nvPr/>
+        </p:nvSpPr>
+        <p:spPr>
+          <a:xfrm>
+            <a:off x="502920" y="4700400"/>
+            <a:ext cx="457200" cy="457200"/>
+          </a:xfrm>
+          <a:prstGeom prst="rect">
+            <a:avLst/>
+          </a:prstGeom>
+          <a:solidFill>
+            <a:srgbClr val="0EA5E9"/>
+          </a:solidFill>
+          <a:ln>
+            <a:noFill/>
+          </a:ln>
+        </p:spPr>
+        <p:style>
+          <a:lnRef idx="1">
+            <a:schemeClr val="accent1"/>
+          </a:lnRef>
+          <a:fillRef idx="3">
+            <a:schemeClr val="accent1"/>
+          </a:fillRef>
+          <a:effectRef idx="2">
+            <a:schemeClr val="accent1"/>
+          </a:effectRef>
+          <a:fontRef idx="minor">
+            <a:schemeClr val="lt1"/>
+          </a:fontRef>
+        </p:style>
+        <p:txBody>
+          <a:bodyPr rtlCol="0" anchor="ctr"/>
+          <a:lstStyle/>
+          <a:p>
+            <a:pPr algn="ctr"/>
+            <a:r>
+              <a:rPr sz="1600" b="0">
+                <a:solidFill>
+                  <a:srgbClr val="FFFFFF"/>
+                </a:solidFill>
+                <a:latin typeface="Arial Black"/>
+              </a:rPr>
+              <a:t>6</a:t>
+            </a:r>
+          </a:p>
+        </p:txBody>
+      </p:sp>
+      <p:sp>
+        <p:nvSpPr>
+          <p:cNvPr id="24" name="TextBox 23"/>
+          <p:cNvSpPr txBox="1"/>
+          <p:nvPr/>
+        </p:nvSpPr>
+        <p:spPr>
+          <a:xfrm>
+            <a:off x="1188720" y="4700400"/>
+            <a:ext cx="2743200" cy="365760"/>
+          </a:xfrm>
+          <a:prstGeom prst="rect">
+            <a:avLst/>
+          </a:prstGeom>
+          <a:noFill/>
+        </p:spPr>
+        <p:txBody>
+          <a:bodyPr wrap="none">
+            <a:spAutoFit/>
+          </a:bodyPr>
+          <a:lstStyle/>
+          <a:p>
+            <a:r>
+              <a:rPr sz="1600" b="0">
+                <a:solidFill>
+                  <a:srgbClr val="0F2740"/>
+                </a:solidFill>
+                <a:latin typeface="Arial Black"/>
+              </a:rPr>
+              <a:t>Compose</a:t>
+            </a:r>
+          </a:p>
+        </p:txBody>
+      </p:sp>
+      <p:sp>
+        <p:nvSpPr>
+          <p:cNvPr id="25" name="TextBox 24"/>
+          <p:cNvSpPr txBox="1"/>
+          <p:nvPr/>
+        </p:nvSpPr>
+        <p:spPr>
+          <a:xfrm>
+            <a:off x="4114800" y="4700400"/>
+            <a:ext cx="7559040" cy="365760"/>
+          </a:xfrm>
+          <a:prstGeom prst="rect">
+            <a:avLst/>
+          </a:prstGeom>
+          <a:noFill/>
+        </p:spPr>
+        <p:txBody>
+          <a:bodyPr wrap="none">
+            <a:spAutoFit/>
+          </a:bodyPr>
+          <a:lstStyle/>
+          <a:p>
+            <a:r>
+              <a:rPr sz="1350" b="0">
+                <a:solidFill>
+                  <a:srgbClr val="47566B"/>
+                </a:solidFill>
+                <a:latin typeface="Calibri"/>
+              </a:rPr>
+              <a:t>Foundation + walls + door + roof = house.</a:t>
+            </a:r>
+          </a:p>
+        </p:txBody>
+      </p:sp>
+      <p:sp>
+        <p:nvSpPr>
+          <p:cNvPr id="26" name="TextBox 25"/>
+          <p:cNvSpPr txBox="1"/>
+          <p:nvPr/>
+        </p:nvSpPr>
+        <p:spPr>
+          <a:xfrm>
+            <a:off x="502920" y="5669280"/>
+            <a:ext cx="11155680" cy="320040"/>
+          </a:xfrm>
+          <a:prstGeom prst="rect">
+            <a:avLst/>
+          </a:prstGeom>
+          <a:noFill/>
+        </p:spPr>
+        <p:txBody>
+          <a:bodyPr wrap="none">
+            <a:spAutoFit/>
+          </a:bodyPr>
+          <a:lstStyle/>
+          <a:p>
+            <a:r>
+              <a:rPr sz="1250" b="1">
+                <a:solidFill>
+                  <a:srgbClr val="F97316"/>
+                </a:solidFill>
+                <a:latin typeface="Calibri"/>
+              </a:rPr>
+              <a:t>This is how you use AI on a </a:t>
+            </a:r>
+            <a:r>
+              <a:rPr sz="1250" b="0">
+                <a:solidFill>
+                  <a:srgbClr val="47566B"/>
+                </a:solidFill>
+                <a:latin typeface="Calibri"/>
+              </a:rPr>
+              <a:t>real project — give it a tree, not a wish.</a:t>
+            </a:r>
+          </a:p>
+        </p:txBody>
+      </p:sp>
+    </p:spTree>
+  </p:cSld>
+  <p:clrMapOvr>
+    <a:masterClrMapping/>
+  </p:clrMapOvr>
+</p:sld>
+</file>
+
 <file path=ppt/slides/slide2.xml><?xml version="1.0" encoding="utf-8"?>
 <p:sld xmlns:a="http://schemas.openxmlformats.org/drawingml/2006/main" xmlns:p="http://schemas.openxmlformats.org/presentationml/2006/main" xmlns:r="http://schemas.openxmlformats.org/officeDocument/2006/relationships">
   <p:cSld>
@@ -4095,6 +5715,4310 @@
                 <a:latin typeface="Calibri"/>
               </a:rPr>
               <a:t>doesn't fix a missing plan.</a:t>
+            </a:r>
+          </a:p>
+        </p:txBody>
+      </p:sp>
+    </p:spTree>
+  </p:cSld>
+  <p:clrMapOvr>
+    <a:masterClrMapping/>
+  </p:clrMapOvr>
+</p:sld>
+</file>
+
+<file path=ppt/slides/slide3.xml><?xml version="1.0" encoding="utf-8"?>
+<p:sld xmlns:a="http://schemas.openxmlformats.org/drawingml/2006/main" xmlns:p="http://schemas.openxmlformats.org/presentationml/2006/main" xmlns:r="http://schemas.openxmlformats.org/officeDocument/2006/relationships">
+  <p:cSld>
+    <p:spTree>
+      <p:nvGrpSpPr>
+        <p:cNvPr id="1" name=""/>
+        <p:cNvGrpSpPr/>
+        <p:nvPr/>
+      </p:nvGrpSpPr>
+      <p:grpSpPr/>
+      <p:sp>
+        <p:nvSpPr>
+          <p:cNvPr id="2" name="Rectangle 1"/>
+          <p:cNvSpPr/>
+          <p:nvPr/>
+        </p:nvSpPr>
+        <p:spPr>
+          <a:xfrm>
+            <a:off x="0" y="0"/>
+            <a:ext cx="12191695" cy="6858000"/>
+          </a:xfrm>
+          <a:prstGeom prst="rect">
+            <a:avLst/>
+          </a:prstGeom>
+          <a:solidFill>
+            <a:srgbClr val="F4F8FC"/>
+          </a:solidFill>
+          <a:ln>
+            <a:noFill/>
+          </a:ln>
+        </p:spPr>
+        <p:style>
+          <a:lnRef idx="1">
+            <a:schemeClr val="accent1"/>
+          </a:lnRef>
+          <a:fillRef idx="3">
+            <a:schemeClr val="accent1"/>
+          </a:fillRef>
+          <a:effectRef idx="2">
+            <a:schemeClr val="accent1"/>
+          </a:effectRef>
+          <a:fontRef idx="minor">
+            <a:schemeClr val="lt1"/>
+          </a:fontRef>
+        </p:style>
+        <p:txBody>
+          <a:bodyPr rtlCol="0" anchor="ctr"/>
+          <a:lstStyle/>
+          <a:p>
+            <a:pPr algn="ctr"/>
+          </a:p>
+        </p:txBody>
+      </p:sp>
+      <p:sp>
+        <p:nvSpPr>
+          <p:cNvPr id="3" name="Rectangle 2"/>
+          <p:cNvSpPr/>
+          <p:nvPr/>
+        </p:nvSpPr>
+        <p:spPr>
+          <a:xfrm>
+            <a:off x="11475720" y="384048"/>
+            <a:ext cx="118872" cy="118872"/>
+          </a:xfrm>
+          <a:prstGeom prst="rect">
+            <a:avLst/>
+          </a:prstGeom>
+          <a:solidFill>
+            <a:srgbClr val="0EA5E9"/>
+          </a:solidFill>
+          <a:ln>
+            <a:noFill/>
+          </a:ln>
+        </p:spPr>
+        <p:style>
+          <a:lnRef idx="1">
+            <a:schemeClr val="accent1"/>
+          </a:lnRef>
+          <a:fillRef idx="3">
+            <a:schemeClr val="accent1"/>
+          </a:fillRef>
+          <a:effectRef idx="2">
+            <a:schemeClr val="accent1"/>
+          </a:effectRef>
+          <a:fontRef idx="minor">
+            <a:schemeClr val="lt1"/>
+          </a:fontRef>
+        </p:style>
+        <p:txBody>
+          <a:bodyPr rtlCol="0" anchor="ctr"/>
+          <a:lstStyle/>
+          <a:p>
+            <a:pPr algn="ctr"/>
+          </a:p>
+        </p:txBody>
+      </p:sp>
+      <p:sp>
+        <p:nvSpPr>
+          <p:cNvPr id="4" name="Rectangle 3"/>
+          <p:cNvSpPr/>
+          <p:nvPr/>
+        </p:nvSpPr>
+        <p:spPr>
+          <a:xfrm>
+            <a:off x="11649456" y="384048"/>
+            <a:ext cx="118872" cy="118872"/>
+          </a:xfrm>
+          <a:prstGeom prst="rect">
+            <a:avLst/>
+          </a:prstGeom>
+          <a:solidFill>
+            <a:srgbClr val="F97316"/>
+          </a:solidFill>
+          <a:ln>
+            <a:noFill/>
+          </a:ln>
+        </p:spPr>
+        <p:style>
+          <a:lnRef idx="1">
+            <a:schemeClr val="accent1"/>
+          </a:lnRef>
+          <a:fillRef idx="3">
+            <a:schemeClr val="accent1"/>
+          </a:fillRef>
+          <a:effectRef idx="2">
+            <a:schemeClr val="accent1"/>
+          </a:effectRef>
+          <a:fontRef idx="minor">
+            <a:schemeClr val="lt1"/>
+          </a:fontRef>
+        </p:style>
+        <p:txBody>
+          <a:bodyPr rtlCol="0" anchor="ctr"/>
+          <a:lstStyle/>
+          <a:p>
+            <a:pPr algn="ctr"/>
+          </a:p>
+        </p:txBody>
+      </p:sp>
+      <p:sp>
+        <p:nvSpPr>
+          <p:cNvPr id="5" name="TextBox 4"/>
+          <p:cNvSpPr txBox="1"/>
+          <p:nvPr/>
+        </p:nvSpPr>
+        <p:spPr>
+          <a:xfrm>
+            <a:off x="502920" y="6510528"/>
+            <a:ext cx="4572000" cy="274320"/>
+          </a:xfrm>
+          <a:prstGeom prst="rect">
+            <a:avLst/>
+          </a:prstGeom>
+          <a:noFill/>
+        </p:spPr>
+        <p:txBody>
+          <a:bodyPr wrap="none">
+            <a:spAutoFit/>
+          </a:bodyPr>
+          <a:lstStyle/>
+          <a:p>
+            <a:r>
+              <a:rPr sz="800" b="0">
+                <a:solidFill>
+                  <a:srgbClr val="8FA3BC"/>
+                </a:solidFill>
+                <a:latin typeface="Calibri"/>
+              </a:rPr>
+              <a:t>Vibe Coding  ·  June 26, 2026</a:t>
+            </a:r>
+          </a:p>
+        </p:txBody>
+      </p:sp>
+      <p:sp>
+        <p:nvSpPr>
+          <p:cNvPr id="6" name="TextBox 5"/>
+          <p:cNvSpPr txBox="1"/>
+          <p:nvPr/>
+        </p:nvSpPr>
+        <p:spPr>
+          <a:xfrm>
+            <a:off x="502920" y="292608"/>
+            <a:ext cx="8229600" cy="274320"/>
+          </a:xfrm>
+          <a:prstGeom prst="rect">
+            <a:avLst/>
+          </a:prstGeom>
+          <a:noFill/>
+        </p:spPr>
+        <p:txBody>
+          <a:bodyPr wrap="none">
+            <a:spAutoFit/>
+          </a:bodyPr>
+          <a:lstStyle/>
+          <a:p>
+            <a:r>
+              <a:rPr sz="1050" b="1">
+                <a:solidFill>
+                  <a:srgbClr val="0284C7"/>
+                </a:solidFill>
+                <a:latin typeface="Arial"/>
+              </a:rPr>
+              <a:t>THE FRAMEWORK</a:t>
+            </a:r>
+          </a:p>
+        </p:txBody>
+      </p:sp>
+      <p:sp>
+        <p:nvSpPr>
+          <p:cNvPr id="7" name="TextBox 6"/>
+          <p:cNvSpPr txBox="1"/>
+          <p:nvPr/>
+        </p:nvSpPr>
+        <p:spPr>
+          <a:xfrm>
+            <a:off x="502920" y="530352"/>
+            <a:ext cx="10241280" cy="640080"/>
+          </a:xfrm>
+          <a:prstGeom prst="rect">
+            <a:avLst/>
+          </a:prstGeom>
+          <a:noFill/>
+        </p:spPr>
+        <p:txBody>
+          <a:bodyPr wrap="none">
+            <a:spAutoFit/>
+          </a:bodyPr>
+          <a:lstStyle/>
+          <a:p>
+            <a:r>
+              <a:rPr sz="2700" b="0">
+                <a:solidFill>
+                  <a:srgbClr val="0F2740"/>
+                </a:solidFill>
+                <a:latin typeface="Arial Black"/>
+              </a:rPr>
+              <a:t>Split by Dependencies, Not Features</a:t>
+            </a:r>
+          </a:p>
+        </p:txBody>
+      </p:sp>
+      <p:sp>
+        <p:nvSpPr>
+          <p:cNvPr id="8" name="TextBox 7"/>
+          <p:cNvSpPr txBox="1"/>
+          <p:nvPr/>
+        </p:nvSpPr>
+        <p:spPr>
+          <a:xfrm>
+            <a:off x="502920" y="1600200"/>
+            <a:ext cx="5486400" cy="3657600"/>
+          </a:xfrm>
+          <a:prstGeom prst="rect">
+            <a:avLst/>
+          </a:prstGeom>
+          <a:noFill/>
+        </p:spPr>
+        <p:txBody>
+          <a:bodyPr wrap="square">
+            <a:spAutoFit/>
+          </a:bodyPr>
+          <a:lstStyle/>
+          <a:p>
+            <a:pPr>
+              <a:spcBef>
+                <a:spcPts val="800"/>
+              </a:spcBef>
+            </a:pPr>
+            <a:r>
+              <a:rPr sz="1500" b="0">
+                <a:solidFill>
+                  <a:srgbClr val="47566B"/>
+                </a:solidFill>
+                <a:latin typeface="Calibri"/>
+              </a:rPr>
+              <a:t>•  Most people split work by feature: “modeling”, “UI”, “AI”…</a:t>
+            </a:r>
+          </a:p>
+          <a:p>
+            <a:pPr>
+              <a:spcBef>
+                <a:spcPts val="800"/>
+              </a:spcBef>
+            </a:pPr>
+            <a:r>
+              <a:rPr sz="1500" b="0">
+                <a:solidFill>
+                  <a:srgbClr val="47566B"/>
+                </a:solidFill>
+                <a:latin typeface="Calibri"/>
+              </a:rPr>
+              <a:t>•  Real projects need hierarchical task decomposition (HTD).</a:t>
+            </a:r>
+          </a:p>
+          <a:p>
+            <a:pPr>
+              <a:spcBef>
+                <a:spcPts val="800"/>
+              </a:spcBef>
+            </a:pPr>
+            <a:r>
+              <a:rPr sz="1500" b="0">
+                <a:solidFill>
+                  <a:srgbClr val="47566B"/>
+                </a:solidFill>
+                <a:latin typeface="Calibri"/>
+              </a:rPr>
+              <a:t>•  Split along dependency chains — what must exist before what.</a:t>
+            </a:r>
+          </a:p>
+          <a:p>
+            <a:pPr>
+              <a:spcBef>
+                <a:spcPts val="800"/>
+              </a:spcBef>
+            </a:pPr>
+            <a:r>
+              <a:rPr sz="1500" b="0">
+                <a:solidFill>
+                  <a:srgbClr val="47566B"/>
+                </a:solidFill>
+                <a:latin typeface="Calibri"/>
+              </a:rPr>
+              <a:t>•  Each layer answers a different question; none of them is “to-do list”.</a:t>
+            </a:r>
+          </a:p>
+        </p:txBody>
+      </p:sp>
+      <p:sp>
+        <p:nvSpPr>
+          <p:cNvPr id="9" name="Rounded Rectangle 8"/>
+          <p:cNvSpPr/>
+          <p:nvPr/>
+        </p:nvSpPr>
+        <p:spPr>
+          <a:xfrm>
+            <a:off x="6217920" y="1600200"/>
+            <a:ext cx="5394960" cy="3657600"/>
+          </a:xfrm>
+          <a:prstGeom prst="roundRect">
+            <a:avLst/>
+          </a:prstGeom>
+          <a:solidFill>
+            <a:srgbClr val="FFFFFF"/>
+          </a:solidFill>
+          <a:ln w="12700">
+            <a:solidFill>
+              <a:srgbClr val="DCE6F0"/>
+            </a:solidFill>
+          </a:ln>
+        </p:spPr>
+        <p:style>
+          <a:lnRef idx="1">
+            <a:schemeClr val="accent1"/>
+          </a:lnRef>
+          <a:fillRef idx="3">
+            <a:schemeClr val="accent1"/>
+          </a:fillRef>
+          <a:effectRef idx="2">
+            <a:schemeClr val="accent1"/>
+          </a:effectRef>
+          <a:fontRef idx="minor">
+            <a:schemeClr val="lt1"/>
+          </a:fontRef>
+        </p:style>
+        <p:txBody>
+          <a:bodyPr rtlCol="0" anchor="ctr" lIns="254000" rIns="203200" tIns="203200" wrap="square"/>
+          <a:lstStyle/>
+          <a:p>
+            <a:pPr algn="ctr">
+              <a:spcBef>
+                <a:spcPts val="200"/>
+              </a:spcBef>
+            </a:pPr>
+            <a:r>
+              <a:rPr sz="1050" b="0">
+                <a:solidFill>
+                  <a:srgbClr val="E8F0F8"/>
+                </a:solidFill>
+                <a:latin typeface="Consolas"/>
+              </a:rPr>
+              <a:t>Feature split          Dependency split</a:t>
+            </a:r>
+          </a:p>
+          <a:p>
+            <a:pPr>
+              <a:spcBef>
+                <a:spcPts val="200"/>
+              </a:spcBef>
+            </a:pPr>
+            <a:r>
+              <a:rPr sz="1050" b="0">
+                <a:solidFill>
+                  <a:srgbClr val="E8F0F8"/>
+                </a:solidFill>
+                <a:latin typeface="Consolas"/>
+              </a:rPr>
+              <a:t>─────────────          ────────────────</a:t>
+            </a:r>
+          </a:p>
+          <a:p>
+            <a:pPr>
+              <a:spcBef>
+                <a:spcPts val="200"/>
+              </a:spcBef>
+            </a:pPr>
+            <a:r>
+              <a:rPr sz="1050" b="0">
+                <a:solidFill>
+                  <a:srgbClr val="E8F0F8"/>
+                </a:solidFill>
+                <a:latin typeface="Consolas"/>
+              </a:rPr>
+              <a:t>"Make a house"    →    Foundation</a:t>
+            </a:r>
+          </a:p>
+          <a:p>
+            <a:pPr>
+              <a:spcBef>
+                <a:spcPts val="200"/>
+              </a:spcBef>
+            </a:pPr>
+            <a:r>
+              <a:rPr sz="1050" b="0">
+                <a:solidFill>
+                  <a:srgbClr val="E8F0F8"/>
+                </a:solidFill>
+                <a:latin typeface="Consolas"/>
+              </a:rPr>
+              <a:t>"Make AI"              → Wall mesh</a:t>
+            </a:r>
+          </a:p>
+          <a:p>
+            <a:pPr>
+              <a:spcBef>
+                <a:spcPts val="200"/>
+              </a:spcBef>
+            </a:pPr>
+            <a:r>
+              <a:rPr sz="1050" b="0">
+                <a:solidFill>
+                  <a:srgbClr val="E8F0F8"/>
+                </a:solidFill>
+                <a:latin typeface="Consolas"/>
+              </a:rPr>
+              <a:t>"Make UI"              → Placement logic</a:t>
+            </a:r>
+          </a:p>
+          <a:p>
+            <a:pPr>
+              <a:spcBef>
+                <a:spcPts val="200"/>
+              </a:spcBef>
+            </a:pPr>
+            <a:r>
+              <a:rPr sz="1050" b="0">
+                <a:solidFill>
+                  <a:srgbClr val="E8F0F8"/>
+                </a:solidFill>
+                <a:latin typeface="Consolas"/>
+              </a:rPr>
+              <a:t>                       → Door + window</a:t>
+            </a:r>
+          </a:p>
+          <a:p>
+            <a:pPr>
+              <a:spcBef>
+                <a:spcPts val="200"/>
+              </a:spcBef>
+            </a:pPr>
+            <a:r>
+              <a:rPr sz="1050" b="0">
+                <a:solidFill>
+                  <a:srgbClr val="E8F0F8"/>
+                </a:solidFill>
+                <a:latin typeface="Consolas"/>
+              </a:rPr>
+              <a:t>                       → Roof snap</a:t>
+            </a:r>
+          </a:p>
+          <a:p>
+            <a:pPr>
+              <a:spcBef>
+                <a:spcPts val="200"/>
+              </a:spcBef>
+            </a:pPr>
+            <a:r>
+              <a:rPr sz="1050" b="0">
+                <a:solidFill>
+                  <a:srgbClr val="E8F0F8"/>
+                </a:solidFill>
+                <a:latin typeface="Consolas"/>
+              </a:rPr>
+              <a:t>                       → Save/load hook</a:t>
+            </a:r>
+          </a:p>
+        </p:txBody>
+      </p:sp>
+      <p:sp>
+        <p:nvSpPr>
+          <p:cNvPr id="10" name="TextBox 9"/>
+          <p:cNvSpPr txBox="1"/>
+          <p:nvPr/>
+        </p:nvSpPr>
+        <p:spPr>
+          <a:xfrm>
+            <a:off x="502920" y="5669280"/>
+            <a:ext cx="11155680" cy="320040"/>
+          </a:xfrm>
+          <a:prstGeom prst="rect">
+            <a:avLst/>
+          </a:prstGeom>
+          <a:noFill/>
+        </p:spPr>
+        <p:txBody>
+          <a:bodyPr wrap="none">
+            <a:spAutoFit/>
+          </a:bodyPr>
+          <a:lstStyle/>
+          <a:p>
+            <a:r>
+              <a:rPr sz="1250" b="1">
+                <a:solidFill>
+                  <a:srgbClr val="F97316"/>
+                </a:solidFill>
+                <a:latin typeface="Calibri"/>
+              </a:rPr>
+              <a:t>Features are labels. </a:t>
+            </a:r>
+            <a:r>
+              <a:rPr sz="1250" b="0">
+                <a:solidFill>
+                  <a:srgbClr val="47566B"/>
+                </a:solidFill>
+                <a:latin typeface="Calibri"/>
+              </a:rPr>
+              <a:t>Dependencies are the real plan.</a:t>
+            </a:r>
+          </a:p>
+        </p:txBody>
+      </p:sp>
+    </p:spTree>
+  </p:cSld>
+  <p:clrMapOvr>
+    <a:masterClrMapping/>
+  </p:clrMapOvr>
+</p:sld>
+</file>
+
+<file path=ppt/slides/slide4.xml><?xml version="1.0" encoding="utf-8"?>
+<p:sld xmlns:a="http://schemas.openxmlformats.org/drawingml/2006/main" xmlns:p="http://schemas.openxmlformats.org/presentationml/2006/main" xmlns:r="http://schemas.openxmlformats.org/officeDocument/2006/relationships">
+  <p:cSld>
+    <p:spTree>
+      <p:nvGrpSpPr>
+        <p:cNvPr id="1" name=""/>
+        <p:cNvGrpSpPr/>
+        <p:nvPr/>
+      </p:nvGrpSpPr>
+      <p:grpSpPr/>
+      <p:sp>
+        <p:nvSpPr>
+          <p:cNvPr id="2" name="Rectangle 1"/>
+          <p:cNvSpPr/>
+          <p:nvPr/>
+        </p:nvSpPr>
+        <p:spPr>
+          <a:xfrm>
+            <a:off x="0" y="0"/>
+            <a:ext cx="12191695" cy="6858000"/>
+          </a:xfrm>
+          <a:prstGeom prst="rect">
+            <a:avLst/>
+          </a:prstGeom>
+          <a:solidFill>
+            <a:srgbClr val="F4F8FC"/>
+          </a:solidFill>
+          <a:ln>
+            <a:noFill/>
+          </a:ln>
+        </p:spPr>
+        <p:style>
+          <a:lnRef idx="1">
+            <a:schemeClr val="accent1"/>
+          </a:lnRef>
+          <a:fillRef idx="3">
+            <a:schemeClr val="accent1"/>
+          </a:fillRef>
+          <a:effectRef idx="2">
+            <a:schemeClr val="accent1"/>
+          </a:effectRef>
+          <a:fontRef idx="minor">
+            <a:schemeClr val="lt1"/>
+          </a:fontRef>
+        </p:style>
+        <p:txBody>
+          <a:bodyPr rtlCol="0" anchor="ctr"/>
+          <a:lstStyle/>
+          <a:p>
+            <a:pPr algn="ctr"/>
+          </a:p>
+        </p:txBody>
+      </p:sp>
+      <p:sp>
+        <p:nvSpPr>
+          <p:cNvPr id="3" name="Rectangle 2"/>
+          <p:cNvSpPr/>
+          <p:nvPr/>
+        </p:nvSpPr>
+        <p:spPr>
+          <a:xfrm>
+            <a:off x="11475720" y="384048"/>
+            <a:ext cx="118872" cy="118872"/>
+          </a:xfrm>
+          <a:prstGeom prst="rect">
+            <a:avLst/>
+          </a:prstGeom>
+          <a:solidFill>
+            <a:srgbClr val="0EA5E9"/>
+          </a:solidFill>
+          <a:ln>
+            <a:noFill/>
+          </a:ln>
+        </p:spPr>
+        <p:style>
+          <a:lnRef idx="1">
+            <a:schemeClr val="accent1"/>
+          </a:lnRef>
+          <a:fillRef idx="3">
+            <a:schemeClr val="accent1"/>
+          </a:fillRef>
+          <a:effectRef idx="2">
+            <a:schemeClr val="accent1"/>
+          </a:effectRef>
+          <a:fontRef idx="minor">
+            <a:schemeClr val="lt1"/>
+          </a:fontRef>
+        </p:style>
+        <p:txBody>
+          <a:bodyPr rtlCol="0" anchor="ctr"/>
+          <a:lstStyle/>
+          <a:p>
+            <a:pPr algn="ctr"/>
+          </a:p>
+        </p:txBody>
+      </p:sp>
+      <p:sp>
+        <p:nvSpPr>
+          <p:cNvPr id="4" name="Rectangle 3"/>
+          <p:cNvSpPr/>
+          <p:nvPr/>
+        </p:nvSpPr>
+        <p:spPr>
+          <a:xfrm>
+            <a:off x="11649456" y="384048"/>
+            <a:ext cx="118872" cy="118872"/>
+          </a:xfrm>
+          <a:prstGeom prst="rect">
+            <a:avLst/>
+          </a:prstGeom>
+          <a:solidFill>
+            <a:srgbClr val="F97316"/>
+          </a:solidFill>
+          <a:ln>
+            <a:noFill/>
+          </a:ln>
+        </p:spPr>
+        <p:style>
+          <a:lnRef idx="1">
+            <a:schemeClr val="accent1"/>
+          </a:lnRef>
+          <a:fillRef idx="3">
+            <a:schemeClr val="accent1"/>
+          </a:fillRef>
+          <a:effectRef idx="2">
+            <a:schemeClr val="accent1"/>
+          </a:effectRef>
+          <a:fontRef idx="minor">
+            <a:schemeClr val="lt1"/>
+          </a:fontRef>
+        </p:style>
+        <p:txBody>
+          <a:bodyPr rtlCol="0" anchor="ctr"/>
+          <a:lstStyle/>
+          <a:p>
+            <a:pPr algn="ctr"/>
+          </a:p>
+        </p:txBody>
+      </p:sp>
+      <p:sp>
+        <p:nvSpPr>
+          <p:cNvPr id="5" name="TextBox 4"/>
+          <p:cNvSpPr txBox="1"/>
+          <p:nvPr/>
+        </p:nvSpPr>
+        <p:spPr>
+          <a:xfrm>
+            <a:off x="502920" y="6510528"/>
+            <a:ext cx="4572000" cy="274320"/>
+          </a:xfrm>
+          <a:prstGeom prst="rect">
+            <a:avLst/>
+          </a:prstGeom>
+          <a:noFill/>
+        </p:spPr>
+        <p:txBody>
+          <a:bodyPr wrap="none">
+            <a:spAutoFit/>
+          </a:bodyPr>
+          <a:lstStyle/>
+          <a:p>
+            <a:r>
+              <a:rPr sz="800" b="0">
+                <a:solidFill>
+                  <a:srgbClr val="8FA3BC"/>
+                </a:solidFill>
+                <a:latin typeface="Calibri"/>
+              </a:rPr>
+              <a:t>Vibe Coding  ·  June 26, 2026</a:t>
+            </a:r>
+          </a:p>
+        </p:txBody>
+      </p:sp>
+      <p:sp>
+        <p:nvSpPr>
+          <p:cNvPr id="6" name="TextBox 5"/>
+          <p:cNvSpPr txBox="1"/>
+          <p:nvPr/>
+        </p:nvSpPr>
+        <p:spPr>
+          <a:xfrm>
+            <a:off x="502920" y="292608"/>
+            <a:ext cx="8229600" cy="274320"/>
+          </a:xfrm>
+          <a:prstGeom prst="rect">
+            <a:avLst/>
+          </a:prstGeom>
+          <a:noFill/>
+        </p:spPr>
+        <p:txBody>
+          <a:bodyPr wrap="none">
+            <a:spAutoFit/>
+          </a:bodyPr>
+          <a:lstStyle/>
+          <a:p>
+            <a:r>
+              <a:rPr sz="1050" b="1">
+                <a:solidFill>
+                  <a:srgbClr val="0284C7"/>
+                </a:solidFill>
+                <a:latin typeface="Arial"/>
+              </a:rPr>
+              <a:t>LAYER 1 · VISION</a:t>
+            </a:r>
+          </a:p>
+        </p:txBody>
+      </p:sp>
+      <p:sp>
+        <p:nvSpPr>
+          <p:cNvPr id="7" name="TextBox 6"/>
+          <p:cNvSpPr txBox="1"/>
+          <p:nvPr/>
+        </p:nvSpPr>
+        <p:spPr>
+          <a:xfrm>
+            <a:off x="502920" y="530352"/>
+            <a:ext cx="10241280" cy="640080"/>
+          </a:xfrm>
+          <a:prstGeom prst="rect">
+            <a:avLst/>
+          </a:prstGeom>
+          <a:noFill/>
+        </p:spPr>
+        <p:txBody>
+          <a:bodyPr wrap="none">
+            <a:spAutoFit/>
+          </a:bodyPr>
+          <a:lstStyle/>
+          <a:p>
+            <a:r>
+              <a:rPr sz="2700" b="0">
+                <a:solidFill>
+                  <a:srgbClr val="0F2740"/>
+                </a:solidFill>
+                <a:latin typeface="Arial Black"/>
+              </a:rPr>
+              <a:t>One Sentence — Never More</a:t>
+            </a:r>
+          </a:p>
+        </p:txBody>
+      </p:sp>
+      <p:sp>
+        <p:nvSpPr>
+          <p:cNvPr id="8" name="Rounded Rectangle 7"/>
+          <p:cNvSpPr/>
+          <p:nvPr/>
+        </p:nvSpPr>
+        <p:spPr>
+          <a:xfrm>
+            <a:off x="502920" y="1600200"/>
+            <a:ext cx="11155680" cy="1280160"/>
+          </a:xfrm>
+          <a:prstGeom prst="roundRect">
+            <a:avLst/>
+          </a:prstGeom>
+          <a:solidFill>
+            <a:srgbClr val="FFFFFF"/>
+          </a:solidFill>
+          <a:ln w="12700">
+            <a:solidFill>
+              <a:srgbClr val="DCE6F0"/>
+            </a:solidFill>
+          </a:ln>
+        </p:spPr>
+        <p:style>
+          <a:lnRef idx="1">
+            <a:schemeClr val="accent1"/>
+          </a:lnRef>
+          <a:fillRef idx="3">
+            <a:schemeClr val="accent1"/>
+          </a:fillRef>
+          <a:effectRef idx="2">
+            <a:schemeClr val="accent1"/>
+          </a:effectRef>
+          <a:fontRef idx="minor">
+            <a:schemeClr val="lt1"/>
+          </a:fontRef>
+        </p:style>
+        <p:txBody>
+          <a:bodyPr rtlCol="0" anchor="ctr" lIns="254000" rIns="203200" tIns="203200" wrap="square"/>
+          <a:lstStyle/>
+          <a:p>
+            <a:pPr algn="ctr">
+              <a:spcBef>
+                <a:spcPts val="200"/>
+              </a:spcBef>
+            </a:pPr>
+            <a:r>
+              <a:rPr sz="1400" b="0">
+                <a:solidFill>
+                  <a:srgbClr val="E8F0F8"/>
+                </a:solidFill>
+                <a:latin typeface="Consolas"/>
+              </a:rPr>
+              <a:t>"After a plane crash, the player survives on an island — gather, build, craft, and finally sail away."</a:t>
+            </a:r>
+          </a:p>
+        </p:txBody>
+      </p:sp>
+      <p:sp>
+        <p:nvSpPr>
+          <p:cNvPr id="9" name="TextBox 8"/>
+          <p:cNvSpPr txBox="1"/>
+          <p:nvPr/>
+        </p:nvSpPr>
+        <p:spPr>
+          <a:xfrm>
+            <a:off x="502920" y="3200400"/>
+            <a:ext cx="10058400" cy="2011680"/>
+          </a:xfrm>
+          <a:prstGeom prst="rect">
+            <a:avLst/>
+          </a:prstGeom>
+          <a:noFill/>
+        </p:spPr>
+        <p:txBody>
+          <a:bodyPr wrap="square">
+            <a:spAutoFit/>
+          </a:bodyPr>
+          <a:lstStyle/>
+          <a:p>
+            <a:pPr>
+              <a:spcBef>
+                <a:spcPts val="800"/>
+              </a:spcBef>
+            </a:pPr>
+            <a:r>
+              <a:rPr sz="1500" b="0">
+                <a:solidFill>
+                  <a:srgbClr val="47566B"/>
+                </a:solidFill>
+                <a:latin typeface="Calibri"/>
+              </a:rPr>
+              <a:t>•  The whole project always fits in one sentence.</a:t>
+            </a:r>
+          </a:p>
+          <a:p>
+            <a:pPr>
+              <a:spcBef>
+                <a:spcPts val="800"/>
+              </a:spcBef>
+            </a:pPr>
+            <a:r>
+              <a:rPr sz="1500" b="0">
+                <a:solidFill>
+                  <a:srgbClr val="47566B"/>
+                </a:solidFill>
+                <a:latin typeface="Calibri"/>
+              </a:rPr>
+              <a:t>•  No sub-bullets. No feature list. No tech stack here.</a:t>
+            </a:r>
+          </a:p>
+          <a:p>
+            <a:pPr>
+              <a:spcBef>
+                <a:spcPts val="800"/>
+              </a:spcBef>
+            </a:pPr>
+            <a:r>
+              <a:rPr sz="1500" b="0">
+                <a:solidFill>
+                  <a:srgbClr val="47566B"/>
+                </a:solidFill>
+                <a:latin typeface="Calibri"/>
+              </a:rPr>
+              <a:t>•  Every later decision asks: does this serve the sentence?</a:t>
+            </a:r>
+          </a:p>
+        </p:txBody>
+      </p:sp>
+      <p:sp>
+        <p:nvSpPr>
+          <p:cNvPr id="10" name="TextBox 9"/>
+          <p:cNvSpPr txBox="1"/>
+          <p:nvPr/>
+        </p:nvSpPr>
+        <p:spPr>
+          <a:xfrm>
+            <a:off x="502920" y="5669280"/>
+            <a:ext cx="11155680" cy="320040"/>
+          </a:xfrm>
+          <a:prstGeom prst="rect">
+            <a:avLst/>
+          </a:prstGeom>
+          <a:noFill/>
+        </p:spPr>
+        <p:txBody>
+          <a:bodyPr wrap="none">
+            <a:spAutoFit/>
+          </a:bodyPr>
+          <a:lstStyle/>
+          <a:p>
+            <a:r>
+              <a:rPr sz="1250" b="1">
+                <a:solidFill>
+                  <a:srgbClr val="F97316"/>
+                </a:solidFill>
+                <a:latin typeface="Calibri"/>
+              </a:rPr>
+              <a:t>If you can't say it in one line, </a:t>
+            </a:r>
+            <a:r>
+              <a:rPr sz="1250" b="0">
+                <a:solidFill>
+                  <a:srgbClr val="47566B"/>
+                </a:solidFill>
+                <a:latin typeface="Calibri"/>
+              </a:rPr>
+              <a:t>you don't have a vision yet.</a:t>
+            </a:r>
+          </a:p>
+        </p:txBody>
+      </p:sp>
+    </p:spTree>
+  </p:cSld>
+  <p:clrMapOvr>
+    <a:masterClrMapping/>
+  </p:clrMapOvr>
+</p:sld>
+</file>
+
+<file path=ppt/slides/slide5.xml><?xml version="1.0" encoding="utf-8"?>
+<p:sld xmlns:a="http://schemas.openxmlformats.org/drawingml/2006/main" xmlns:p="http://schemas.openxmlformats.org/presentationml/2006/main" xmlns:r="http://schemas.openxmlformats.org/officeDocument/2006/relationships">
+  <p:cSld>
+    <p:spTree>
+      <p:nvGrpSpPr>
+        <p:cNvPr id="1" name=""/>
+        <p:cNvGrpSpPr/>
+        <p:nvPr/>
+      </p:nvGrpSpPr>
+      <p:grpSpPr/>
+      <p:sp>
+        <p:nvSpPr>
+          <p:cNvPr id="2" name="Rectangle 1"/>
+          <p:cNvSpPr/>
+          <p:nvPr/>
+        </p:nvSpPr>
+        <p:spPr>
+          <a:xfrm>
+            <a:off x="0" y="0"/>
+            <a:ext cx="12191695" cy="6858000"/>
+          </a:xfrm>
+          <a:prstGeom prst="rect">
+            <a:avLst/>
+          </a:prstGeom>
+          <a:solidFill>
+            <a:srgbClr val="F4F8FC"/>
+          </a:solidFill>
+          <a:ln>
+            <a:noFill/>
+          </a:ln>
+        </p:spPr>
+        <p:style>
+          <a:lnRef idx="1">
+            <a:schemeClr val="accent1"/>
+          </a:lnRef>
+          <a:fillRef idx="3">
+            <a:schemeClr val="accent1"/>
+          </a:fillRef>
+          <a:effectRef idx="2">
+            <a:schemeClr val="accent1"/>
+          </a:effectRef>
+          <a:fontRef idx="minor">
+            <a:schemeClr val="lt1"/>
+          </a:fontRef>
+        </p:style>
+        <p:txBody>
+          <a:bodyPr rtlCol="0" anchor="ctr"/>
+          <a:lstStyle/>
+          <a:p>
+            <a:pPr algn="ctr"/>
+          </a:p>
+        </p:txBody>
+      </p:sp>
+      <p:sp>
+        <p:nvSpPr>
+          <p:cNvPr id="3" name="Rectangle 2"/>
+          <p:cNvSpPr/>
+          <p:nvPr/>
+        </p:nvSpPr>
+        <p:spPr>
+          <a:xfrm>
+            <a:off x="11475720" y="384048"/>
+            <a:ext cx="118872" cy="118872"/>
+          </a:xfrm>
+          <a:prstGeom prst="rect">
+            <a:avLst/>
+          </a:prstGeom>
+          <a:solidFill>
+            <a:srgbClr val="0EA5E9"/>
+          </a:solidFill>
+          <a:ln>
+            <a:noFill/>
+          </a:ln>
+        </p:spPr>
+        <p:style>
+          <a:lnRef idx="1">
+            <a:schemeClr val="accent1"/>
+          </a:lnRef>
+          <a:fillRef idx="3">
+            <a:schemeClr val="accent1"/>
+          </a:fillRef>
+          <a:effectRef idx="2">
+            <a:schemeClr val="accent1"/>
+          </a:effectRef>
+          <a:fontRef idx="minor">
+            <a:schemeClr val="lt1"/>
+          </a:fontRef>
+        </p:style>
+        <p:txBody>
+          <a:bodyPr rtlCol="0" anchor="ctr"/>
+          <a:lstStyle/>
+          <a:p>
+            <a:pPr algn="ctr"/>
+          </a:p>
+        </p:txBody>
+      </p:sp>
+      <p:sp>
+        <p:nvSpPr>
+          <p:cNvPr id="4" name="Rectangle 3"/>
+          <p:cNvSpPr/>
+          <p:nvPr/>
+        </p:nvSpPr>
+        <p:spPr>
+          <a:xfrm>
+            <a:off x="11649456" y="384048"/>
+            <a:ext cx="118872" cy="118872"/>
+          </a:xfrm>
+          <a:prstGeom prst="rect">
+            <a:avLst/>
+          </a:prstGeom>
+          <a:solidFill>
+            <a:srgbClr val="F97316"/>
+          </a:solidFill>
+          <a:ln>
+            <a:noFill/>
+          </a:ln>
+        </p:spPr>
+        <p:style>
+          <a:lnRef idx="1">
+            <a:schemeClr val="accent1"/>
+          </a:lnRef>
+          <a:fillRef idx="3">
+            <a:schemeClr val="accent1"/>
+          </a:fillRef>
+          <a:effectRef idx="2">
+            <a:schemeClr val="accent1"/>
+          </a:effectRef>
+          <a:fontRef idx="minor">
+            <a:schemeClr val="lt1"/>
+          </a:fontRef>
+        </p:style>
+        <p:txBody>
+          <a:bodyPr rtlCol="0" anchor="ctr"/>
+          <a:lstStyle/>
+          <a:p>
+            <a:pPr algn="ctr"/>
+          </a:p>
+        </p:txBody>
+      </p:sp>
+      <p:sp>
+        <p:nvSpPr>
+          <p:cNvPr id="5" name="TextBox 4"/>
+          <p:cNvSpPr txBox="1"/>
+          <p:nvPr/>
+        </p:nvSpPr>
+        <p:spPr>
+          <a:xfrm>
+            <a:off x="502920" y="6510528"/>
+            <a:ext cx="4572000" cy="274320"/>
+          </a:xfrm>
+          <a:prstGeom prst="rect">
+            <a:avLst/>
+          </a:prstGeom>
+          <a:noFill/>
+        </p:spPr>
+        <p:txBody>
+          <a:bodyPr wrap="none">
+            <a:spAutoFit/>
+          </a:bodyPr>
+          <a:lstStyle/>
+          <a:p>
+            <a:r>
+              <a:rPr sz="800" b="0">
+                <a:solidFill>
+                  <a:srgbClr val="8FA3BC"/>
+                </a:solidFill>
+                <a:latin typeface="Calibri"/>
+              </a:rPr>
+              <a:t>Vibe Coding  ·  June 26, 2026</a:t>
+            </a:r>
+          </a:p>
+        </p:txBody>
+      </p:sp>
+      <p:sp>
+        <p:nvSpPr>
+          <p:cNvPr id="6" name="TextBox 5"/>
+          <p:cNvSpPr txBox="1"/>
+          <p:nvPr/>
+        </p:nvSpPr>
+        <p:spPr>
+          <a:xfrm>
+            <a:off x="502920" y="292608"/>
+            <a:ext cx="8229600" cy="274320"/>
+          </a:xfrm>
+          <a:prstGeom prst="rect">
+            <a:avLst/>
+          </a:prstGeom>
+          <a:noFill/>
+        </p:spPr>
+        <p:txBody>
+          <a:bodyPr wrap="none">
+            <a:spAutoFit/>
+          </a:bodyPr>
+          <a:lstStyle/>
+          <a:p>
+            <a:r>
+              <a:rPr sz="1050" b="1">
+                <a:solidFill>
+                  <a:srgbClr val="0284C7"/>
+                </a:solidFill>
+                <a:latin typeface="Arial"/>
+              </a:rPr>
+              <a:t>LAYER 2 · CORE LOOP</a:t>
+            </a:r>
+          </a:p>
+        </p:txBody>
+      </p:sp>
+      <p:sp>
+        <p:nvSpPr>
+          <p:cNvPr id="7" name="TextBox 6"/>
+          <p:cNvSpPr txBox="1"/>
+          <p:nvPr/>
+        </p:nvSpPr>
+        <p:spPr>
+          <a:xfrm>
+            <a:off x="502920" y="530352"/>
+            <a:ext cx="10241280" cy="640080"/>
+          </a:xfrm>
+          <a:prstGeom prst="rect">
+            <a:avLst/>
+          </a:prstGeom>
+          <a:noFill/>
+        </p:spPr>
+        <p:txBody>
+          <a:bodyPr wrap="none">
+            <a:spAutoFit/>
+          </a:bodyPr>
+          <a:lstStyle/>
+          <a:p>
+            <a:r>
+              <a:rPr sz="2700" b="0">
+                <a:solidFill>
+                  <a:srgbClr val="0F2740"/>
+                </a:solidFill>
+                <a:latin typeface="Arial Black"/>
+              </a:rPr>
+              <a:t>Gameplay Systems, Not Assets</a:t>
+            </a:r>
+          </a:p>
+        </p:txBody>
+      </p:sp>
+      <p:sp>
+        <p:nvSpPr>
+          <p:cNvPr id="8" name="Rounded Rectangle 7"/>
+          <p:cNvSpPr/>
+          <p:nvPr/>
+        </p:nvSpPr>
+        <p:spPr>
+          <a:xfrm>
+            <a:off x="502920" y="1600200"/>
+            <a:ext cx="4572000" cy="3657600"/>
+          </a:xfrm>
+          <a:prstGeom prst="roundRect">
+            <a:avLst/>
+          </a:prstGeom>
+          <a:solidFill>
+            <a:srgbClr val="FFFFFF"/>
+          </a:solidFill>
+          <a:ln w="12700">
+            <a:solidFill>
+              <a:srgbClr val="DCE6F0"/>
+            </a:solidFill>
+          </a:ln>
+        </p:spPr>
+        <p:style>
+          <a:lnRef idx="1">
+            <a:schemeClr val="accent1"/>
+          </a:lnRef>
+          <a:fillRef idx="3">
+            <a:schemeClr val="accent1"/>
+          </a:fillRef>
+          <a:effectRef idx="2">
+            <a:schemeClr val="accent1"/>
+          </a:effectRef>
+          <a:fontRef idx="minor">
+            <a:schemeClr val="lt1"/>
+          </a:fontRef>
+        </p:style>
+        <p:txBody>
+          <a:bodyPr rtlCol="0" anchor="ctr" lIns="254000" rIns="203200" tIns="203200" wrap="square"/>
+          <a:lstStyle/>
+          <a:p>
+            <a:pPr algn="ctr">
+              <a:spcBef>
+                <a:spcPts val="200"/>
+              </a:spcBef>
+            </a:pPr>
+            <a:r>
+              <a:rPr sz="1200" b="0">
+                <a:solidFill>
+                  <a:srgbClr val="E8F0F8"/>
+                </a:solidFill>
+                <a:latin typeface="Consolas"/>
+              </a:rPr>
+              <a:t>Explore</a:t>
+            </a:r>
+          </a:p>
+          <a:p>
+            <a:pPr>
+              <a:spcBef>
+                <a:spcPts val="200"/>
+              </a:spcBef>
+            </a:pPr>
+            <a:r>
+              <a:rPr sz="1200" b="0">
+                <a:solidFill>
+                  <a:srgbClr val="0284C7"/>
+                </a:solidFill>
+                <a:latin typeface="Consolas"/>
+              </a:rPr>
+              <a:t>  ↓</a:t>
+            </a:r>
+          </a:p>
+          <a:p>
+            <a:pPr>
+              <a:spcBef>
+                <a:spcPts val="200"/>
+              </a:spcBef>
+            </a:pPr>
+            <a:r>
+              <a:rPr sz="1200" b="0">
+                <a:solidFill>
+                  <a:srgbClr val="E8F0F8"/>
+                </a:solidFill>
+                <a:latin typeface="Consolas"/>
+              </a:rPr>
+              <a:t>Gather resources</a:t>
+            </a:r>
+          </a:p>
+          <a:p>
+            <a:pPr>
+              <a:spcBef>
+                <a:spcPts val="200"/>
+              </a:spcBef>
+            </a:pPr>
+            <a:r>
+              <a:rPr sz="1200" b="0">
+                <a:solidFill>
+                  <a:srgbClr val="0284C7"/>
+                </a:solidFill>
+                <a:latin typeface="Consolas"/>
+              </a:rPr>
+              <a:t>  ↓</a:t>
+            </a:r>
+          </a:p>
+          <a:p>
+            <a:pPr>
+              <a:spcBef>
+                <a:spcPts val="200"/>
+              </a:spcBef>
+            </a:pPr>
+            <a:r>
+              <a:rPr sz="1200" b="0">
+                <a:solidFill>
+                  <a:srgbClr val="E8F0F8"/>
+                </a:solidFill>
+                <a:latin typeface="Consolas"/>
+              </a:rPr>
+              <a:t>Craft tools</a:t>
+            </a:r>
+          </a:p>
+          <a:p>
+            <a:pPr>
+              <a:spcBef>
+                <a:spcPts val="200"/>
+              </a:spcBef>
+            </a:pPr>
+            <a:r>
+              <a:rPr sz="1200" b="0">
+                <a:solidFill>
+                  <a:srgbClr val="0284C7"/>
+                </a:solidFill>
+                <a:latin typeface="Consolas"/>
+              </a:rPr>
+              <a:t>  ↓</a:t>
+            </a:r>
+          </a:p>
+          <a:p>
+            <a:pPr>
+              <a:spcBef>
+                <a:spcPts val="200"/>
+              </a:spcBef>
+            </a:pPr>
+            <a:r>
+              <a:rPr sz="1200" b="0">
+                <a:solidFill>
+                  <a:srgbClr val="E8F0F8"/>
+                </a:solidFill>
+                <a:latin typeface="Consolas"/>
+              </a:rPr>
+              <a:t>Build shelter</a:t>
+            </a:r>
+          </a:p>
+          <a:p>
+            <a:pPr>
+              <a:spcBef>
+                <a:spcPts val="200"/>
+              </a:spcBef>
+            </a:pPr>
+            <a:r>
+              <a:rPr sz="1200" b="0">
+                <a:solidFill>
+                  <a:srgbClr val="0284C7"/>
+                </a:solidFill>
+                <a:latin typeface="Consolas"/>
+              </a:rPr>
+              <a:t>  ↓</a:t>
+            </a:r>
+          </a:p>
+          <a:p>
+            <a:pPr>
+              <a:spcBef>
+                <a:spcPts val="200"/>
+              </a:spcBef>
+            </a:pPr>
+            <a:r>
+              <a:rPr sz="1200" b="0">
+                <a:solidFill>
+                  <a:srgbClr val="E8F0F8"/>
+                </a:solidFill>
+                <a:latin typeface="Consolas"/>
+              </a:rPr>
+              <a:t>Unlock better resources</a:t>
+            </a:r>
+          </a:p>
+          <a:p>
+            <a:pPr>
+              <a:spcBef>
+                <a:spcPts val="200"/>
+              </a:spcBef>
+            </a:pPr>
+            <a:r>
+              <a:rPr sz="1200" b="0">
+                <a:solidFill>
+                  <a:srgbClr val="0284C7"/>
+                </a:solidFill>
+                <a:latin typeface="Consolas"/>
+              </a:rPr>
+              <a:t>  ↓</a:t>
+            </a:r>
+          </a:p>
+          <a:p>
+            <a:pPr>
+              <a:spcBef>
+                <a:spcPts val="200"/>
+              </a:spcBef>
+            </a:pPr>
+            <a:r>
+              <a:rPr sz="1200" b="0">
+                <a:solidFill>
+                  <a:srgbClr val="E8F0F8"/>
+                </a:solidFill>
+                <a:latin typeface="Consolas"/>
+              </a:rPr>
+              <a:t>Explore farther</a:t>
+            </a:r>
+          </a:p>
+        </p:txBody>
+      </p:sp>
+      <p:sp>
+        <p:nvSpPr>
+          <p:cNvPr id="9" name="Rounded Rectangle 8"/>
+          <p:cNvSpPr/>
+          <p:nvPr/>
+        </p:nvSpPr>
+        <p:spPr>
+          <a:xfrm>
+            <a:off x="5120640" y="1600200"/>
+            <a:ext cx="6492240" cy="3657600"/>
+          </a:xfrm>
+          <a:prstGeom prst="roundRect">
+            <a:avLst/>
+          </a:prstGeom>
+          <a:solidFill>
+            <a:srgbClr val="FFFFFF"/>
+          </a:solidFill>
+          <a:ln w="12700">
+            <a:solidFill>
+              <a:srgbClr val="DCE6F0"/>
+            </a:solidFill>
+          </a:ln>
+        </p:spPr>
+        <p:style>
+          <a:lnRef idx="1">
+            <a:schemeClr val="accent1"/>
+          </a:lnRef>
+          <a:fillRef idx="3">
+            <a:schemeClr val="accent1"/>
+          </a:fillRef>
+          <a:effectRef idx="2">
+            <a:schemeClr val="accent1"/>
+          </a:effectRef>
+          <a:fontRef idx="minor">
+            <a:schemeClr val="lt1"/>
+          </a:fontRef>
+        </p:style>
+        <p:txBody>
+          <a:bodyPr rtlCol="0" anchor="ctr" lIns="254000" rIns="203200" tIns="203200" wrap="square"/>
+          <a:lstStyle/>
+          <a:p>
+            <a:pPr algn="ctr">
+              <a:spcBef>
+                <a:spcPts val="200"/>
+              </a:spcBef>
+            </a:pPr>
+            <a:r>
+              <a:rPr sz="1200" b="0">
+                <a:solidFill>
+                  <a:srgbClr val="F97316"/>
+                </a:solidFill>
+                <a:latin typeface="Consolas"/>
+              </a:rPr>
+              <a:t>Game</a:t>
+            </a:r>
+          </a:p>
+          <a:p>
+            <a:pPr>
+              <a:spcBef>
+                <a:spcPts val="200"/>
+              </a:spcBef>
+            </a:pPr>
+            <a:r>
+              <a:rPr sz="1200" b="0">
+                <a:solidFill>
+                  <a:srgbClr val="0284C7"/>
+                </a:solidFill>
+                <a:latin typeface="Consolas"/>
+              </a:rPr>
+              <a:t>├── World</a:t>
+            </a:r>
+          </a:p>
+          <a:p>
+            <a:pPr>
+              <a:spcBef>
+                <a:spcPts val="200"/>
+              </a:spcBef>
+            </a:pPr>
+            <a:r>
+              <a:rPr sz="1200" b="0">
+                <a:solidFill>
+                  <a:srgbClr val="0284C7"/>
+                </a:solidFill>
+                <a:latin typeface="Consolas"/>
+              </a:rPr>
+              <a:t>├── Player</a:t>
+            </a:r>
+          </a:p>
+          <a:p>
+            <a:pPr>
+              <a:spcBef>
+                <a:spcPts val="200"/>
+              </a:spcBef>
+            </a:pPr>
+            <a:r>
+              <a:rPr sz="1200" b="0">
+                <a:solidFill>
+                  <a:srgbClr val="0284C7"/>
+                </a:solidFill>
+                <a:latin typeface="Consolas"/>
+              </a:rPr>
+              <a:t>├── Building</a:t>
+            </a:r>
+          </a:p>
+          <a:p>
+            <a:pPr>
+              <a:spcBef>
+                <a:spcPts val="200"/>
+              </a:spcBef>
+            </a:pPr>
+            <a:r>
+              <a:rPr sz="1200" b="0">
+                <a:solidFill>
+                  <a:srgbClr val="0284C7"/>
+                </a:solidFill>
+                <a:latin typeface="Consolas"/>
+              </a:rPr>
+              <a:t>├── Crafting</a:t>
+            </a:r>
+          </a:p>
+          <a:p>
+            <a:pPr>
+              <a:spcBef>
+                <a:spcPts val="200"/>
+              </a:spcBef>
+            </a:pPr>
+            <a:r>
+              <a:rPr sz="1200" b="0">
+                <a:solidFill>
+                  <a:srgbClr val="0284C7"/>
+                </a:solidFill>
+                <a:latin typeface="Consolas"/>
+              </a:rPr>
+              <a:t>├── Survival</a:t>
+            </a:r>
+          </a:p>
+          <a:p>
+            <a:pPr>
+              <a:spcBef>
+                <a:spcPts val="200"/>
+              </a:spcBef>
+            </a:pPr>
+            <a:r>
+              <a:rPr sz="1200" b="0">
+                <a:solidFill>
+                  <a:srgbClr val="0284C7"/>
+                </a:solidFill>
+                <a:latin typeface="Consolas"/>
+              </a:rPr>
+              <a:t>├── AI</a:t>
+            </a:r>
+          </a:p>
+          <a:p>
+            <a:pPr>
+              <a:spcBef>
+                <a:spcPts val="200"/>
+              </a:spcBef>
+            </a:pPr>
+            <a:r>
+              <a:rPr sz="1200" b="0">
+                <a:solidFill>
+                  <a:srgbClr val="0284C7"/>
+                </a:solidFill>
+                <a:latin typeface="Consolas"/>
+              </a:rPr>
+              <a:t>├── UI</a:t>
+            </a:r>
+          </a:p>
+          <a:p>
+            <a:pPr>
+              <a:spcBef>
+                <a:spcPts val="200"/>
+              </a:spcBef>
+            </a:pPr>
+            <a:r>
+              <a:rPr sz="1200" b="0">
+                <a:solidFill>
+                  <a:srgbClr val="0284C7"/>
+                </a:solidFill>
+                <a:latin typeface="Consolas"/>
+              </a:rPr>
+              <a:t>└── Save</a:t>
+            </a:r>
+          </a:p>
+        </p:txBody>
+      </p:sp>
+      <p:sp>
+        <p:nvSpPr>
+          <p:cNvPr id="10" name="TextBox 9"/>
+          <p:cNvSpPr txBox="1"/>
+          <p:nvPr/>
+        </p:nvSpPr>
+        <p:spPr>
+          <a:xfrm>
+            <a:off x="502920" y="5669280"/>
+            <a:ext cx="11155680" cy="320040"/>
+          </a:xfrm>
+          <a:prstGeom prst="rect">
+            <a:avLst/>
+          </a:prstGeom>
+          <a:noFill/>
+        </p:spPr>
+        <p:txBody>
+          <a:bodyPr wrap="none">
+            <a:spAutoFit/>
+          </a:bodyPr>
+          <a:lstStyle/>
+          <a:p>
+            <a:r>
+              <a:rPr sz="1250" b="1">
+                <a:solidFill>
+                  <a:srgbClr val="F97316"/>
+                </a:solidFill>
+                <a:latin typeface="Calibri"/>
+              </a:rPr>
+              <a:t>Layer 2 is not “model a tree”. </a:t>
+            </a:r>
+            <a:r>
+              <a:rPr sz="1250" b="0">
+                <a:solidFill>
+                  <a:srgbClr val="47566B"/>
+                </a:solidFill>
+                <a:latin typeface="Calibri"/>
+              </a:rPr>
+              <a:t>It’s the systems the loop needs.</a:t>
+            </a:r>
+          </a:p>
+        </p:txBody>
+      </p:sp>
+    </p:spTree>
+  </p:cSld>
+  <p:clrMapOvr>
+    <a:masterClrMapping/>
+  </p:clrMapOvr>
+</p:sld>
+</file>
+
+<file path=ppt/slides/slide6.xml><?xml version="1.0" encoding="utf-8"?>
+<p:sld xmlns:a="http://schemas.openxmlformats.org/drawingml/2006/main" xmlns:p="http://schemas.openxmlformats.org/presentationml/2006/main" xmlns:r="http://schemas.openxmlformats.org/officeDocument/2006/relationships">
+  <p:cSld>
+    <p:spTree>
+      <p:nvGrpSpPr>
+        <p:cNvPr id="1" name=""/>
+        <p:cNvGrpSpPr/>
+        <p:nvPr/>
+      </p:nvGrpSpPr>
+      <p:grpSpPr/>
+      <p:sp>
+        <p:nvSpPr>
+          <p:cNvPr id="2" name="Rectangle 1"/>
+          <p:cNvSpPr/>
+          <p:nvPr/>
+        </p:nvSpPr>
+        <p:spPr>
+          <a:xfrm>
+            <a:off x="0" y="0"/>
+            <a:ext cx="12191695" cy="6858000"/>
+          </a:xfrm>
+          <a:prstGeom prst="rect">
+            <a:avLst/>
+          </a:prstGeom>
+          <a:solidFill>
+            <a:srgbClr val="F4F8FC"/>
+          </a:solidFill>
+          <a:ln>
+            <a:noFill/>
+          </a:ln>
+        </p:spPr>
+        <p:style>
+          <a:lnRef idx="1">
+            <a:schemeClr val="accent1"/>
+          </a:lnRef>
+          <a:fillRef idx="3">
+            <a:schemeClr val="accent1"/>
+          </a:fillRef>
+          <a:effectRef idx="2">
+            <a:schemeClr val="accent1"/>
+          </a:effectRef>
+          <a:fontRef idx="minor">
+            <a:schemeClr val="lt1"/>
+          </a:fontRef>
+        </p:style>
+        <p:txBody>
+          <a:bodyPr rtlCol="0" anchor="ctr"/>
+          <a:lstStyle/>
+          <a:p>
+            <a:pPr algn="ctr"/>
+          </a:p>
+        </p:txBody>
+      </p:sp>
+      <p:sp>
+        <p:nvSpPr>
+          <p:cNvPr id="3" name="Rectangle 2"/>
+          <p:cNvSpPr/>
+          <p:nvPr/>
+        </p:nvSpPr>
+        <p:spPr>
+          <a:xfrm>
+            <a:off x="11475720" y="384048"/>
+            <a:ext cx="118872" cy="118872"/>
+          </a:xfrm>
+          <a:prstGeom prst="rect">
+            <a:avLst/>
+          </a:prstGeom>
+          <a:solidFill>
+            <a:srgbClr val="0EA5E9"/>
+          </a:solidFill>
+          <a:ln>
+            <a:noFill/>
+          </a:ln>
+        </p:spPr>
+        <p:style>
+          <a:lnRef idx="1">
+            <a:schemeClr val="accent1"/>
+          </a:lnRef>
+          <a:fillRef idx="3">
+            <a:schemeClr val="accent1"/>
+          </a:fillRef>
+          <a:effectRef idx="2">
+            <a:schemeClr val="accent1"/>
+          </a:effectRef>
+          <a:fontRef idx="minor">
+            <a:schemeClr val="lt1"/>
+          </a:fontRef>
+        </p:style>
+        <p:txBody>
+          <a:bodyPr rtlCol="0" anchor="ctr"/>
+          <a:lstStyle/>
+          <a:p>
+            <a:pPr algn="ctr"/>
+          </a:p>
+        </p:txBody>
+      </p:sp>
+      <p:sp>
+        <p:nvSpPr>
+          <p:cNvPr id="4" name="Rectangle 3"/>
+          <p:cNvSpPr/>
+          <p:nvPr/>
+        </p:nvSpPr>
+        <p:spPr>
+          <a:xfrm>
+            <a:off x="11649456" y="384048"/>
+            <a:ext cx="118872" cy="118872"/>
+          </a:xfrm>
+          <a:prstGeom prst="rect">
+            <a:avLst/>
+          </a:prstGeom>
+          <a:solidFill>
+            <a:srgbClr val="F97316"/>
+          </a:solidFill>
+          <a:ln>
+            <a:noFill/>
+          </a:ln>
+        </p:spPr>
+        <p:style>
+          <a:lnRef idx="1">
+            <a:schemeClr val="accent1"/>
+          </a:lnRef>
+          <a:fillRef idx="3">
+            <a:schemeClr val="accent1"/>
+          </a:fillRef>
+          <a:effectRef idx="2">
+            <a:schemeClr val="accent1"/>
+          </a:effectRef>
+          <a:fontRef idx="minor">
+            <a:schemeClr val="lt1"/>
+          </a:fontRef>
+        </p:style>
+        <p:txBody>
+          <a:bodyPr rtlCol="0" anchor="ctr"/>
+          <a:lstStyle/>
+          <a:p>
+            <a:pPr algn="ctr"/>
+          </a:p>
+        </p:txBody>
+      </p:sp>
+      <p:sp>
+        <p:nvSpPr>
+          <p:cNvPr id="5" name="TextBox 4"/>
+          <p:cNvSpPr txBox="1"/>
+          <p:nvPr/>
+        </p:nvSpPr>
+        <p:spPr>
+          <a:xfrm>
+            <a:off x="502920" y="6510528"/>
+            <a:ext cx="4572000" cy="274320"/>
+          </a:xfrm>
+          <a:prstGeom prst="rect">
+            <a:avLst/>
+          </a:prstGeom>
+          <a:noFill/>
+        </p:spPr>
+        <p:txBody>
+          <a:bodyPr wrap="none">
+            <a:spAutoFit/>
+          </a:bodyPr>
+          <a:lstStyle/>
+          <a:p>
+            <a:r>
+              <a:rPr sz="800" b="0">
+                <a:solidFill>
+                  <a:srgbClr val="8FA3BC"/>
+                </a:solidFill>
+                <a:latin typeface="Calibri"/>
+              </a:rPr>
+              <a:t>Vibe Coding  ·  June 26, 2026</a:t>
+            </a:r>
+          </a:p>
+        </p:txBody>
+      </p:sp>
+      <p:sp>
+        <p:nvSpPr>
+          <p:cNvPr id="6" name="TextBox 5"/>
+          <p:cNvSpPr txBox="1"/>
+          <p:nvPr/>
+        </p:nvSpPr>
+        <p:spPr>
+          <a:xfrm>
+            <a:off x="502920" y="292608"/>
+            <a:ext cx="8229600" cy="274320"/>
+          </a:xfrm>
+          <a:prstGeom prst="rect">
+            <a:avLst/>
+          </a:prstGeom>
+          <a:noFill/>
+        </p:spPr>
+        <p:txBody>
+          <a:bodyPr wrap="none">
+            <a:spAutoFit/>
+          </a:bodyPr>
+          <a:lstStyle/>
+          <a:p>
+            <a:r>
+              <a:rPr sz="1050" b="1">
+                <a:solidFill>
+                  <a:srgbClr val="0284C7"/>
+                </a:solidFill>
+                <a:latin typeface="Arial"/>
+              </a:rPr>
+              <a:t>LAYER 3 · MODULES</a:t>
+            </a:r>
+          </a:p>
+        </p:txBody>
+      </p:sp>
+      <p:sp>
+        <p:nvSpPr>
+          <p:cNvPr id="7" name="TextBox 6"/>
+          <p:cNvSpPr txBox="1"/>
+          <p:nvPr/>
+        </p:nvSpPr>
+        <p:spPr>
+          <a:xfrm>
+            <a:off x="502920" y="530352"/>
+            <a:ext cx="10241280" cy="640080"/>
+          </a:xfrm>
+          <a:prstGeom prst="rect">
+            <a:avLst/>
+          </a:prstGeom>
+          <a:noFill/>
+        </p:spPr>
+        <p:txBody>
+          <a:bodyPr wrap="none">
+            <a:spAutoFit/>
+          </a:bodyPr>
+          <a:lstStyle/>
+          <a:p>
+            <a:r>
+              <a:rPr sz="2700" b="0">
+                <a:solidFill>
+                  <a:srgbClr val="0F2740"/>
+                </a:solidFill>
+                <a:latin typeface="Arial Black"/>
+              </a:rPr>
+              <a:t>Split Until the Piece Has a Name</a:t>
+            </a:r>
+          </a:p>
+        </p:txBody>
+      </p:sp>
+      <p:sp>
+        <p:nvSpPr>
+          <p:cNvPr id="8" name="Rounded Rectangle 7"/>
+          <p:cNvSpPr/>
+          <p:nvPr/>
+        </p:nvSpPr>
+        <p:spPr>
+          <a:xfrm>
+            <a:off x="502920" y="1500000"/>
+            <a:ext cx="5394960" cy="4114800"/>
+          </a:xfrm>
+          <a:prstGeom prst="roundRect">
+            <a:avLst/>
+          </a:prstGeom>
+          <a:solidFill>
+            <a:srgbClr val="FFFFFF"/>
+          </a:solidFill>
+          <a:ln w="12700">
+            <a:solidFill>
+              <a:srgbClr val="DCE6F0"/>
+            </a:solidFill>
+          </a:ln>
+        </p:spPr>
+        <p:style>
+          <a:lnRef idx="1">
+            <a:schemeClr val="accent1"/>
+          </a:lnRef>
+          <a:fillRef idx="3">
+            <a:schemeClr val="accent1"/>
+          </a:fillRef>
+          <a:effectRef idx="2">
+            <a:schemeClr val="accent1"/>
+          </a:effectRef>
+          <a:fontRef idx="minor">
+            <a:schemeClr val="lt1"/>
+          </a:fontRef>
+        </p:style>
+        <p:txBody>
+          <a:bodyPr rtlCol="0" anchor="ctr" lIns="254000" rIns="203200" tIns="203200" wrap="square"/>
+          <a:lstStyle/>
+          <a:p>
+            <a:pPr algn="ctr">
+              <a:spcBef>
+                <a:spcPts val="200"/>
+              </a:spcBef>
+            </a:pPr>
+            <a:r>
+              <a:rPr sz="1100" b="0">
+                <a:solidFill>
+                  <a:srgbClr val="F97316"/>
+                </a:solidFill>
+                <a:latin typeface="Consolas"/>
+              </a:rPr>
+              <a:t>Building</a:t>
+            </a:r>
+          </a:p>
+          <a:p>
+            <a:pPr>
+              <a:spcBef>
+                <a:spcPts val="200"/>
+              </a:spcBef>
+            </a:pPr>
+            <a:r>
+              <a:rPr sz="1100" b="0">
+                <a:solidFill>
+                  <a:srgbClr val="0284C7"/>
+                </a:solidFill>
+                <a:latin typeface="Consolas"/>
+              </a:rPr>
+              <a:t>├── Foundation</a:t>
+            </a:r>
+          </a:p>
+          <a:p>
+            <a:pPr>
+              <a:spcBef>
+                <a:spcPts val="200"/>
+              </a:spcBef>
+            </a:pPr>
+            <a:r>
+              <a:rPr sz="1100" b="0">
+                <a:solidFill>
+                  <a:srgbClr val="0284C7"/>
+                </a:solidFill>
+                <a:latin typeface="Consolas"/>
+              </a:rPr>
+              <a:t>├── Floor</a:t>
+            </a:r>
+          </a:p>
+          <a:p>
+            <a:pPr>
+              <a:spcBef>
+                <a:spcPts val="200"/>
+              </a:spcBef>
+            </a:pPr>
+            <a:r>
+              <a:rPr sz="1100" b="0">
+                <a:solidFill>
+                  <a:srgbClr val="0284C7"/>
+                </a:solidFill>
+                <a:latin typeface="Consolas"/>
+              </a:rPr>
+              <a:t>├── Wall</a:t>
+            </a:r>
+          </a:p>
+          <a:p>
+            <a:pPr>
+              <a:spcBef>
+                <a:spcPts val="200"/>
+              </a:spcBef>
+            </a:pPr>
+            <a:r>
+              <a:rPr sz="1100" b="0">
+                <a:solidFill>
+                  <a:srgbClr val="0284C7"/>
+                </a:solidFill>
+                <a:latin typeface="Consolas"/>
+              </a:rPr>
+              <a:t>├── Window</a:t>
+            </a:r>
+          </a:p>
+          <a:p>
+            <a:pPr>
+              <a:spcBef>
+                <a:spcPts val="200"/>
+              </a:spcBef>
+            </a:pPr>
+            <a:r>
+              <a:rPr sz="1100" b="0">
+                <a:solidFill>
+                  <a:srgbClr val="0284C7"/>
+                </a:solidFill>
+                <a:latin typeface="Consolas"/>
+              </a:rPr>
+              <a:t>├── Door</a:t>
+            </a:r>
+          </a:p>
+          <a:p>
+            <a:pPr>
+              <a:spcBef>
+                <a:spcPts val="200"/>
+              </a:spcBef>
+            </a:pPr>
+            <a:r>
+              <a:rPr sz="1100" b="0">
+                <a:solidFill>
+                  <a:srgbClr val="0284C7"/>
+                </a:solidFill>
+                <a:latin typeface="Consolas"/>
+              </a:rPr>
+              <a:t>├── Roof</a:t>
+            </a:r>
+          </a:p>
+          <a:p>
+            <a:pPr>
+              <a:spcBef>
+                <a:spcPts val="200"/>
+              </a:spcBef>
+            </a:pPr>
+            <a:r>
+              <a:rPr sz="1100" b="0">
+                <a:solidFill>
+                  <a:srgbClr val="0284C7"/>
+                </a:solidFill>
+                <a:latin typeface="Consolas"/>
+              </a:rPr>
+              <a:t>└── Decoration</a:t>
+            </a:r>
+          </a:p>
+          <a:p>
+            <a:pPr>
+              <a:spcBef>
+                <a:spcPts val="200"/>
+              </a:spcBef>
+            </a:pPr>
+            <a:r>
+              <a:rPr sz="1100" b="0">
+                <a:solidFill>
+                  <a:srgbClr val="E8F0F8"/>
+                </a:solidFill>
+                <a:latin typeface="Consolas"/>
+              </a:rPr>
+              <a:t/>
+            </a:r>
+          </a:p>
+          <a:p>
+            <a:pPr>
+              <a:spcBef>
+                <a:spcPts val="200"/>
+              </a:spcBef>
+            </a:pPr>
+            <a:r>
+              <a:rPr sz="1100" b="0">
+                <a:solidFill>
+                  <a:srgbClr val="F97316"/>
+                </a:solidFill>
+                <a:latin typeface="Consolas"/>
+              </a:rPr>
+              <a:t>Wall</a:t>
+            </a:r>
+          </a:p>
+          <a:p>
+            <a:pPr>
+              <a:spcBef>
+                <a:spcPts val="200"/>
+              </a:spcBef>
+            </a:pPr>
+            <a:r>
+              <a:rPr sz="1100" b="0">
+                <a:solidFill>
+                  <a:srgbClr val="0284C7"/>
+                </a:solidFill>
+                <a:latin typeface="Consolas"/>
+              </a:rPr>
+              <a:t>├── 3D Model</a:t>
+            </a:r>
+          </a:p>
+          <a:p>
+            <a:pPr>
+              <a:spcBef>
+                <a:spcPts val="200"/>
+              </a:spcBef>
+            </a:pPr>
+            <a:r>
+              <a:rPr sz="1100" b="0">
+                <a:solidFill>
+                  <a:srgbClr val="0284C7"/>
+                </a:solidFill>
+                <a:latin typeface="Consolas"/>
+              </a:rPr>
+              <a:t>├── Material</a:t>
+            </a:r>
+          </a:p>
+          <a:p>
+            <a:pPr>
+              <a:spcBef>
+                <a:spcPts val="200"/>
+              </a:spcBef>
+            </a:pPr>
+            <a:r>
+              <a:rPr sz="1100" b="0">
+                <a:solidFill>
+                  <a:srgbClr val="0284C7"/>
+                </a:solidFill>
+                <a:latin typeface="Consolas"/>
+              </a:rPr>
+              <a:t>├── Collision</a:t>
+            </a:r>
+          </a:p>
+          <a:p>
+            <a:pPr>
+              <a:spcBef>
+                <a:spcPts val="200"/>
+              </a:spcBef>
+            </a:pPr>
+            <a:r>
+              <a:rPr sz="1100" b="0">
+                <a:solidFill>
+                  <a:srgbClr val="0284C7"/>
+                </a:solidFill>
+                <a:latin typeface="Consolas"/>
+              </a:rPr>
+              <a:t>├── Placement Logic</a:t>
+            </a:r>
+          </a:p>
+          <a:p>
+            <a:pPr>
+              <a:spcBef>
+                <a:spcPts val="200"/>
+              </a:spcBef>
+            </a:pPr>
+            <a:r>
+              <a:rPr sz="1100" b="0">
+                <a:solidFill>
+                  <a:srgbClr val="0284C7"/>
+                </a:solidFill>
+                <a:latin typeface="Consolas"/>
+              </a:rPr>
+              <a:t>├── Health</a:t>
+            </a:r>
+          </a:p>
+          <a:p>
+            <a:pPr>
+              <a:spcBef>
+                <a:spcPts val="200"/>
+              </a:spcBef>
+            </a:pPr>
+            <a:r>
+              <a:rPr sz="1100" b="0">
+                <a:solidFill>
+                  <a:srgbClr val="0284C7"/>
+                </a:solidFill>
+                <a:latin typeface="Consolas"/>
+              </a:rPr>
+              <a:t>└── Destroy Effect</a:t>
+            </a:r>
+          </a:p>
+        </p:txBody>
+      </p:sp>
+      <p:sp>
+        <p:nvSpPr>
+          <p:cNvPr id="9" name="TextBox 8"/>
+          <p:cNvSpPr txBox="1"/>
+          <p:nvPr/>
+        </p:nvSpPr>
+        <p:spPr>
+          <a:xfrm>
+            <a:off x="6217920" y="1600200"/>
+            <a:ext cx="5394960" cy="3200400"/>
+          </a:xfrm>
+          <a:prstGeom prst="rect">
+            <a:avLst/>
+          </a:prstGeom>
+          <a:noFill/>
+        </p:spPr>
+        <p:txBody>
+          <a:bodyPr wrap="square">
+            <a:spAutoFit/>
+          </a:bodyPr>
+          <a:lstStyle/>
+          <a:p>
+            <a:pPr>
+              <a:spcBef>
+                <a:spcPts val="800"/>
+              </a:spcBef>
+            </a:pPr>
+            <a:r>
+              <a:rPr sz="1400" b="0">
+                <a:solidFill>
+                  <a:srgbClr val="47566B"/>
+                </a:solidFill>
+                <a:latin typeface="Calibri"/>
+              </a:rPr>
+              <a:t>•  Pick one module from Layer 2 — then explode it.</a:t>
+            </a:r>
+          </a:p>
+          <a:p>
+            <a:pPr>
+              <a:spcBef>
+                <a:spcPts val="800"/>
+              </a:spcBef>
+            </a:pPr>
+            <a:r>
+              <a:rPr sz="1400" b="0">
+                <a:solidFill>
+                  <a:srgbClr val="47566B"/>
+                </a:solidFill>
+                <a:latin typeface="Calibri"/>
+              </a:rPr>
+              <a:t>•  “Building” is still too big to assign or test.</a:t>
+            </a:r>
+          </a:p>
+          <a:p>
+            <a:pPr>
+              <a:spcBef>
+                <a:spcPts val="800"/>
+              </a:spcBef>
+            </a:pPr>
+            <a:r>
+              <a:rPr sz="1400" b="0">
+                <a:solidFill>
+                  <a:srgbClr val="47566B"/>
+                </a:solidFill>
+                <a:latin typeface="Calibri"/>
+              </a:rPr>
+              <a:t>•  “Wall placement logic” is getting close.</a:t>
+            </a:r>
+          </a:p>
+          <a:p>
+            <a:pPr>
+              <a:spcBef>
+                <a:spcPts val="800"/>
+              </a:spcBef>
+            </a:pPr>
+            <a:r>
+              <a:rPr sz="1400" b="0">
+                <a:solidFill>
+                  <a:srgbClr val="47566B"/>
+                </a:solidFill>
+                <a:latin typeface="Calibri"/>
+              </a:rPr>
+              <a:t>•  Keep going until each leaf has one job.</a:t>
+            </a:r>
+          </a:p>
+        </p:txBody>
+      </p:sp>
+      <p:sp>
+        <p:nvSpPr>
+          <p:cNvPr id="10" name="TextBox 9"/>
+          <p:cNvSpPr txBox="1"/>
+          <p:nvPr/>
+        </p:nvSpPr>
+        <p:spPr>
+          <a:xfrm>
+            <a:off x="502920" y="5669280"/>
+            <a:ext cx="11155680" cy="320040"/>
+          </a:xfrm>
+          <a:prstGeom prst="rect">
+            <a:avLst/>
+          </a:prstGeom>
+          <a:noFill/>
+        </p:spPr>
+        <p:txBody>
+          <a:bodyPr wrap="none">
+            <a:spAutoFit/>
+          </a:bodyPr>
+          <a:lstStyle/>
+          <a:p>
+            <a:r>
+              <a:rPr sz="1250" b="1">
+                <a:solidFill>
+                  <a:srgbClr val="F97316"/>
+                </a:solidFill>
+                <a:latin typeface="Calibri"/>
+              </a:rPr>
+              <a:t>Stop naming big nouns. </a:t>
+            </a:r>
+            <a:r>
+              <a:rPr sz="1250" b="0">
+                <a:solidFill>
+                  <a:srgbClr val="47566B"/>
+                </a:solidFill>
+                <a:latin typeface="Calibri"/>
+              </a:rPr>
+              <a:t>Start naming shippable parts.</a:t>
+            </a:r>
+          </a:p>
+        </p:txBody>
+      </p:sp>
+    </p:spTree>
+  </p:cSld>
+  <p:clrMapOvr>
+    <a:masterClrMapping/>
+  </p:clrMapOvr>
+</p:sld>
+</file>
+
+<file path=ppt/slides/slide7.xml><?xml version="1.0" encoding="utf-8"?>
+<p:sld xmlns:a="http://schemas.openxmlformats.org/drawingml/2006/main" xmlns:p="http://schemas.openxmlformats.org/presentationml/2006/main" xmlns:r="http://schemas.openxmlformats.org/officeDocument/2006/relationships">
+  <p:cSld>
+    <p:spTree>
+      <p:nvGrpSpPr>
+        <p:cNvPr id="1" name=""/>
+        <p:cNvGrpSpPr/>
+        <p:nvPr/>
+      </p:nvGrpSpPr>
+      <p:grpSpPr/>
+      <p:sp>
+        <p:nvSpPr>
+          <p:cNvPr id="2" name="Rectangle 1"/>
+          <p:cNvSpPr/>
+          <p:nvPr/>
+        </p:nvSpPr>
+        <p:spPr>
+          <a:xfrm>
+            <a:off x="0" y="0"/>
+            <a:ext cx="12191695" cy="6858000"/>
+          </a:xfrm>
+          <a:prstGeom prst="rect">
+            <a:avLst/>
+          </a:prstGeom>
+          <a:solidFill>
+            <a:srgbClr val="F4F8FC"/>
+          </a:solidFill>
+          <a:ln>
+            <a:noFill/>
+          </a:ln>
+        </p:spPr>
+        <p:style>
+          <a:lnRef idx="1">
+            <a:schemeClr val="accent1"/>
+          </a:lnRef>
+          <a:fillRef idx="3">
+            <a:schemeClr val="accent1"/>
+          </a:fillRef>
+          <a:effectRef idx="2">
+            <a:schemeClr val="accent1"/>
+          </a:effectRef>
+          <a:fontRef idx="minor">
+            <a:schemeClr val="lt1"/>
+          </a:fontRef>
+        </p:style>
+        <p:txBody>
+          <a:bodyPr rtlCol="0" anchor="ctr"/>
+          <a:lstStyle/>
+          <a:p>
+            <a:pPr algn="ctr"/>
+          </a:p>
+        </p:txBody>
+      </p:sp>
+      <p:sp>
+        <p:nvSpPr>
+          <p:cNvPr id="3" name="Rectangle 2"/>
+          <p:cNvSpPr/>
+          <p:nvPr/>
+        </p:nvSpPr>
+        <p:spPr>
+          <a:xfrm>
+            <a:off x="11475720" y="384048"/>
+            <a:ext cx="118872" cy="118872"/>
+          </a:xfrm>
+          <a:prstGeom prst="rect">
+            <a:avLst/>
+          </a:prstGeom>
+          <a:solidFill>
+            <a:srgbClr val="0EA5E9"/>
+          </a:solidFill>
+          <a:ln>
+            <a:noFill/>
+          </a:ln>
+        </p:spPr>
+        <p:style>
+          <a:lnRef idx="1">
+            <a:schemeClr val="accent1"/>
+          </a:lnRef>
+          <a:fillRef idx="3">
+            <a:schemeClr val="accent1"/>
+          </a:fillRef>
+          <a:effectRef idx="2">
+            <a:schemeClr val="accent1"/>
+          </a:effectRef>
+          <a:fontRef idx="minor">
+            <a:schemeClr val="lt1"/>
+          </a:fontRef>
+        </p:style>
+        <p:txBody>
+          <a:bodyPr rtlCol="0" anchor="ctr"/>
+          <a:lstStyle/>
+          <a:p>
+            <a:pPr algn="ctr"/>
+          </a:p>
+        </p:txBody>
+      </p:sp>
+      <p:sp>
+        <p:nvSpPr>
+          <p:cNvPr id="4" name="Rectangle 3"/>
+          <p:cNvSpPr/>
+          <p:nvPr/>
+        </p:nvSpPr>
+        <p:spPr>
+          <a:xfrm>
+            <a:off x="11649456" y="384048"/>
+            <a:ext cx="118872" cy="118872"/>
+          </a:xfrm>
+          <a:prstGeom prst="rect">
+            <a:avLst/>
+          </a:prstGeom>
+          <a:solidFill>
+            <a:srgbClr val="F97316"/>
+          </a:solidFill>
+          <a:ln>
+            <a:noFill/>
+          </a:ln>
+        </p:spPr>
+        <p:style>
+          <a:lnRef idx="1">
+            <a:schemeClr val="accent1"/>
+          </a:lnRef>
+          <a:fillRef idx="3">
+            <a:schemeClr val="accent1"/>
+          </a:fillRef>
+          <a:effectRef idx="2">
+            <a:schemeClr val="accent1"/>
+          </a:effectRef>
+          <a:fontRef idx="minor">
+            <a:schemeClr val="lt1"/>
+          </a:fontRef>
+        </p:style>
+        <p:txBody>
+          <a:bodyPr rtlCol="0" anchor="ctr"/>
+          <a:lstStyle/>
+          <a:p>
+            <a:pPr algn="ctr"/>
+          </a:p>
+        </p:txBody>
+      </p:sp>
+      <p:sp>
+        <p:nvSpPr>
+          <p:cNvPr id="5" name="TextBox 4"/>
+          <p:cNvSpPr txBox="1"/>
+          <p:nvPr/>
+        </p:nvSpPr>
+        <p:spPr>
+          <a:xfrm>
+            <a:off x="502920" y="6510528"/>
+            <a:ext cx="4572000" cy="274320"/>
+          </a:xfrm>
+          <a:prstGeom prst="rect">
+            <a:avLst/>
+          </a:prstGeom>
+          <a:noFill/>
+        </p:spPr>
+        <p:txBody>
+          <a:bodyPr wrap="none">
+            <a:spAutoFit/>
+          </a:bodyPr>
+          <a:lstStyle/>
+          <a:p>
+            <a:r>
+              <a:rPr sz="800" b="0">
+                <a:solidFill>
+                  <a:srgbClr val="8FA3BC"/>
+                </a:solidFill>
+                <a:latin typeface="Calibri"/>
+              </a:rPr>
+              <a:t>Vibe Coding  ·  June 26, 2026</a:t>
+            </a:r>
+          </a:p>
+        </p:txBody>
+      </p:sp>
+      <p:sp>
+        <p:nvSpPr>
+          <p:cNvPr id="6" name="TextBox 5"/>
+          <p:cNvSpPr txBox="1"/>
+          <p:nvPr/>
+        </p:nvSpPr>
+        <p:spPr>
+          <a:xfrm>
+            <a:off x="502920" y="292608"/>
+            <a:ext cx="8229600" cy="274320"/>
+          </a:xfrm>
+          <a:prstGeom prst="rect">
+            <a:avLst/>
+          </a:prstGeom>
+          <a:noFill/>
+        </p:spPr>
+        <p:txBody>
+          <a:bodyPr wrap="none">
+            <a:spAutoFit/>
+          </a:bodyPr>
+          <a:lstStyle/>
+          <a:p>
+            <a:r>
+              <a:rPr sz="1050" b="1">
+                <a:solidFill>
+                  <a:srgbClr val="0284C7"/>
+                </a:solidFill>
+                <a:latin typeface="Arial"/>
+              </a:rPr>
+              <a:t>LAYER 4 · TASKS</a:t>
+            </a:r>
+          </a:p>
+        </p:txBody>
+      </p:sp>
+      <p:sp>
+        <p:nvSpPr>
+          <p:cNvPr id="7" name="TextBox 6"/>
+          <p:cNvSpPr txBox="1"/>
+          <p:nvPr/>
+        </p:nvSpPr>
+        <p:spPr>
+          <a:xfrm>
+            <a:off x="502920" y="530352"/>
+            <a:ext cx="10241280" cy="640080"/>
+          </a:xfrm>
+          <a:prstGeom prst="rect">
+            <a:avLst/>
+          </a:prstGeom>
+          <a:noFill/>
+        </p:spPr>
+        <p:txBody>
+          <a:bodyPr wrap="none">
+            <a:spAutoFit/>
+          </a:bodyPr>
+          <a:lstStyle/>
+          <a:p>
+            <a:r>
+              <a:rPr sz="2700" b="0">
+                <a:solidFill>
+                  <a:srgbClr val="0F2740"/>
+                </a:solidFill>
+                <a:latin typeface="Arial Black"/>
+              </a:rPr>
+              <a:t>Small Enough to Finish in One Sitting</a:t>
+            </a:r>
+          </a:p>
+        </p:txBody>
+      </p:sp>
+      <p:sp>
+        <p:nvSpPr>
+          <p:cNvPr id="8" name="Rounded Rectangle 7"/>
+          <p:cNvSpPr/>
+          <p:nvPr/>
+        </p:nvSpPr>
+        <p:spPr>
+          <a:xfrm>
+            <a:off x="502920" y="1500000"/>
+            <a:ext cx="5120640" cy="4114800"/>
+          </a:xfrm>
+          <a:prstGeom prst="roundRect">
+            <a:avLst/>
+          </a:prstGeom>
+          <a:solidFill>
+            <a:srgbClr val="FFFFFF"/>
+          </a:solidFill>
+          <a:ln w="12700">
+            <a:solidFill>
+              <a:srgbClr val="DCE6F0"/>
+            </a:solidFill>
+          </a:ln>
+        </p:spPr>
+        <p:style>
+          <a:lnRef idx="1">
+            <a:schemeClr val="accent1"/>
+          </a:lnRef>
+          <a:fillRef idx="3">
+            <a:schemeClr val="accent1"/>
+          </a:fillRef>
+          <a:effectRef idx="2">
+            <a:schemeClr val="accent1"/>
+          </a:effectRef>
+          <a:fontRef idx="minor">
+            <a:schemeClr val="lt1"/>
+          </a:fontRef>
+        </p:style>
+        <p:txBody>
+          <a:bodyPr rtlCol="0" anchor="ctr" lIns="254000" rIns="203200" tIns="203200" wrap="square"/>
+          <a:lstStyle/>
+          <a:p>
+            <a:pPr algn="ctr">
+              <a:spcBef>
+                <a:spcPts val="200"/>
+              </a:spcBef>
+            </a:pPr>
+            <a:r>
+              <a:rPr sz="1050" b="0">
+                <a:solidFill>
+                  <a:srgbClr val="E8F0F8"/>
+                </a:solidFill>
+                <a:latin typeface="Consolas"/>
+              </a:rPr>
+              <a:t>Wall Model</a:t>
+            </a:r>
+          </a:p>
+          <a:p>
+            <a:pPr>
+              <a:spcBef>
+                <a:spcPts val="200"/>
+              </a:spcBef>
+            </a:pPr>
+            <a:r>
+              <a:rPr sz="1050" b="0">
+                <a:solidFill>
+                  <a:srgbClr val="0284C7"/>
+                </a:solidFill>
+                <a:latin typeface="Consolas"/>
+              </a:rPr>
+              <a:t>├── Cube mesh</a:t>
+            </a:r>
+          </a:p>
+          <a:p>
+            <a:pPr>
+              <a:spcBef>
+                <a:spcPts val="200"/>
+              </a:spcBef>
+            </a:pPr>
+            <a:r>
+              <a:rPr sz="1050" b="0">
+                <a:solidFill>
+                  <a:srgbClr val="0284C7"/>
+                </a:solidFill>
+                <a:latin typeface="Consolas"/>
+              </a:rPr>
+              <a:t>├── UV unwrap</a:t>
+            </a:r>
+          </a:p>
+          <a:p>
+            <a:pPr>
+              <a:spcBef>
+                <a:spcPts val="200"/>
+              </a:spcBef>
+            </a:pPr>
+            <a:r>
+              <a:rPr sz="1050" b="0">
+                <a:solidFill>
+                  <a:srgbClr val="0284C7"/>
+                </a:solidFill>
+                <a:latin typeface="Consolas"/>
+              </a:rPr>
+              <a:t>├── Wood texture</a:t>
+            </a:r>
+          </a:p>
+          <a:p>
+            <a:pPr>
+              <a:spcBef>
+                <a:spcPts val="200"/>
+              </a:spcBef>
+            </a:pPr>
+            <a:r>
+              <a:rPr sz="1050" b="0">
+                <a:solidFill>
+                  <a:srgbClr val="0284C7"/>
+                </a:solidFill>
+                <a:latin typeface="Consolas"/>
+              </a:rPr>
+              <a:t>├── Normal map</a:t>
+            </a:r>
+          </a:p>
+          <a:p>
+            <a:pPr>
+              <a:spcBef>
+                <a:spcPts val="200"/>
+              </a:spcBef>
+            </a:pPr>
+            <a:r>
+              <a:rPr sz="1050" b="0">
+                <a:solidFill>
+                  <a:srgbClr val="0284C7"/>
+                </a:solidFill>
+                <a:latin typeface="Consolas"/>
+              </a:rPr>
+              <a:t>├── AO bake</a:t>
+            </a:r>
+          </a:p>
+          <a:p>
+            <a:pPr>
+              <a:spcBef>
+                <a:spcPts val="200"/>
+              </a:spcBef>
+            </a:pPr>
+            <a:r>
+              <a:rPr sz="1050" b="0">
+                <a:solidFill>
+                  <a:srgbClr val="0284C7"/>
+                </a:solidFill>
+                <a:latin typeface="Consolas"/>
+              </a:rPr>
+              <a:t>└── Export GLB</a:t>
+            </a:r>
+          </a:p>
+          <a:p>
+            <a:pPr>
+              <a:spcBef>
+                <a:spcPts val="200"/>
+              </a:spcBef>
+            </a:pPr>
+            <a:r>
+              <a:rPr sz="1050" b="0">
+                <a:solidFill>
+                  <a:srgbClr val="E8F0F8"/>
+                </a:solidFill>
+                <a:latin typeface="Consolas"/>
+              </a:rPr>
+              <a:t/>
+            </a:r>
+          </a:p>
+          <a:p>
+            <a:pPr>
+              <a:spcBef>
+                <a:spcPts val="200"/>
+              </a:spcBef>
+            </a:pPr>
+            <a:r>
+              <a:rPr sz="1050" b="0">
+                <a:solidFill>
+                  <a:srgbClr val="E8F0F8"/>
+                </a:solidFill>
+                <a:latin typeface="Consolas"/>
+              </a:rPr>
+              <a:t>Texture variants</a:t>
+            </a:r>
+          </a:p>
+          <a:p>
+            <a:pPr>
+              <a:spcBef>
+                <a:spcPts val="200"/>
+              </a:spcBef>
+            </a:pPr>
+            <a:r>
+              <a:rPr sz="1050" b="0">
+                <a:solidFill>
+                  <a:srgbClr val="0284C7"/>
+                </a:solidFill>
+                <a:latin typeface="Consolas"/>
+              </a:rPr>
+              <a:t>├── Wood</a:t>
+            </a:r>
+          </a:p>
+          <a:p>
+            <a:pPr>
+              <a:spcBef>
+                <a:spcPts val="200"/>
+              </a:spcBef>
+            </a:pPr>
+            <a:r>
+              <a:rPr sz="1050" b="0">
+                <a:solidFill>
+                  <a:srgbClr val="0284C7"/>
+                </a:solidFill>
+                <a:latin typeface="Consolas"/>
+              </a:rPr>
+              <a:t>├── Moss</a:t>
+            </a:r>
+          </a:p>
+          <a:p>
+            <a:pPr>
+              <a:spcBef>
+                <a:spcPts val="200"/>
+              </a:spcBef>
+            </a:pPr>
+            <a:r>
+              <a:rPr sz="1050" b="0">
+                <a:solidFill>
+                  <a:srgbClr val="0284C7"/>
+                </a:solidFill>
+                <a:latin typeface="Consolas"/>
+              </a:rPr>
+              <a:t>├── Broken</a:t>
+            </a:r>
+          </a:p>
+          <a:p>
+            <a:pPr>
+              <a:spcBef>
+                <a:spcPts val="200"/>
+              </a:spcBef>
+            </a:pPr>
+            <a:r>
+              <a:rPr sz="1050" b="0">
+                <a:solidFill>
+                  <a:srgbClr val="0284C7"/>
+                </a:solidFill>
+                <a:latin typeface="Consolas"/>
+              </a:rPr>
+              <a:t>└── Burned</a:t>
+            </a:r>
+          </a:p>
+        </p:txBody>
+      </p:sp>
+      <p:sp>
+        <p:nvSpPr>
+          <p:cNvPr id="9" name="TextBox 8"/>
+          <p:cNvSpPr txBox="1"/>
+          <p:nvPr/>
+        </p:nvSpPr>
+        <p:spPr>
+          <a:xfrm>
+            <a:off x="5486400" y="1600200"/>
+            <a:ext cx="6126480" cy="3657600"/>
+          </a:xfrm>
+          <a:prstGeom prst="rect">
+            <a:avLst/>
+          </a:prstGeom>
+          <a:noFill/>
+        </p:spPr>
+        <p:txBody>
+          <a:bodyPr wrap="square">
+            <a:spAutoFit/>
+          </a:bodyPr>
+          <a:lstStyle/>
+          <a:p>
+            <a:pPr>
+              <a:spcBef>
+                <a:spcPts val="800"/>
+              </a:spcBef>
+            </a:pPr>
+            <a:r>
+              <a:rPr sz="1250" b="0">
+                <a:solidFill>
+                  <a:srgbClr val="47566B"/>
+                </a:solidFill>
+                <a:latin typeface="Calibri"/>
+              </a:rPr>
+              <a:t>•  Airplane → exterior, wing, engine, cockpit, seats, doors…</a:t>
+            </a:r>
+          </a:p>
+          <a:p>
+            <a:pPr>
+              <a:spcBef>
+                <a:spcPts val="800"/>
+              </a:spcBef>
+            </a:pPr>
+            <a:r>
+              <a:rPr sz="1250" b="0">
+                <a:solidFill>
+                  <a:srgbClr val="47566B"/>
+                </a:solidFill>
+                <a:latin typeface="Calibri"/>
+              </a:rPr>
+              <a:t>•  Cockpit → dashboard, seat, glass, levers, buttons…</a:t>
+            </a:r>
+          </a:p>
+          <a:p>
+            <a:pPr>
+              <a:spcBef>
+                <a:spcPts val="800"/>
+              </a:spcBef>
+            </a:pPr>
+            <a:r>
+              <a:rPr sz="1250" b="0">
+                <a:solidFill>
+                  <a:srgbClr val="47566B"/>
+                </a:solidFill>
+                <a:latin typeface="Calibri"/>
+              </a:rPr>
+              <a:t>•  Dashboard → speed, fuel, altitude, warning lights.</a:t>
+            </a:r>
+          </a:p>
+          <a:p>
+            <a:pPr>
+              <a:spcBef>
+                <a:spcPts val="800"/>
+              </a:spcBef>
+            </a:pPr>
+            <a:r>
+              <a:rPr sz="1250" b="0">
+                <a:solidFill>
+                  <a:srgbClr val="47566B"/>
+                </a:solidFill>
+                <a:latin typeface="Calibri"/>
+              </a:rPr>
+              <a:t>•  House → foundation, walls, roof — not “house”.</a:t>
+            </a:r>
+          </a:p>
+          <a:p>
+            <a:pPr>
+              <a:spcBef>
+                <a:spcPts val="800"/>
+              </a:spcBef>
+            </a:pPr>
+            <a:r>
+              <a:rPr sz="1250" b="0">
+                <a:solidFill>
+                  <a:srgbClr val="47566B"/>
+                </a:solidFill>
+                <a:latin typeface="Calibri"/>
+              </a:rPr>
+              <a:t>•  Player → mesh, skeleton, animations, clothes, hair…</a:t>
+            </a:r>
+          </a:p>
+          <a:p>
+            <a:pPr>
+              <a:spcBef>
+                <a:spcPts val="800"/>
+              </a:spcBef>
+            </a:pPr>
+            <a:r>
+              <a:rPr sz="1250" b="0">
+                <a:solidFill>
+                  <a:srgbClr val="47566B"/>
+                </a:solidFill>
+                <a:latin typeface="Calibri"/>
+              </a:rPr>
+              <a:t>•  Deer AI → idle, eat, run, escape, death.</a:t>
+            </a:r>
+          </a:p>
+        </p:txBody>
+      </p:sp>
+      <p:sp>
+        <p:nvSpPr>
+          <p:cNvPr id="10" name="TextBox 9"/>
+          <p:cNvSpPr txBox="1"/>
+          <p:nvPr/>
+        </p:nvSpPr>
+        <p:spPr>
+          <a:xfrm>
+            <a:off x="502920" y="5669280"/>
+            <a:ext cx="11155680" cy="320040"/>
+          </a:xfrm>
+          <a:prstGeom prst="rect">
+            <a:avLst/>
+          </a:prstGeom>
+          <a:noFill/>
+        </p:spPr>
+        <p:txBody>
+          <a:bodyPr wrap="none">
+            <a:spAutoFit/>
+          </a:bodyPr>
+          <a:lstStyle/>
+          <a:p>
+            <a:r>
+              <a:rPr sz="1250" b="1">
+                <a:solidFill>
+                  <a:srgbClr val="F97316"/>
+                </a:solidFill>
+                <a:latin typeface="Calibri"/>
+              </a:rPr>
+              <a:t>Rule of thumb: </a:t>
+            </a:r>
+            <a:r>
+              <a:rPr sz="1250" b="0">
+                <a:solidFill>
+                  <a:srgbClr val="47566B"/>
+                </a:solidFill>
+                <a:latin typeface="Calibri"/>
+              </a:rPr>
+              <a:t>one model ≈ one focused hour.</a:t>
+            </a:r>
+          </a:p>
+        </p:txBody>
+      </p:sp>
+    </p:spTree>
+  </p:cSld>
+  <p:clrMapOvr>
+    <a:masterClrMapping/>
+  </p:clrMapOvr>
+</p:sld>
+</file>
+
+<file path=ppt/slides/slide8.xml><?xml version="1.0" encoding="utf-8"?>
+<p:sld xmlns:a="http://schemas.openxmlformats.org/drawingml/2006/main" xmlns:p="http://schemas.openxmlformats.org/presentationml/2006/main" xmlns:r="http://schemas.openxmlformats.org/officeDocument/2006/relationships">
+  <p:cSld>
+    <p:spTree>
+      <p:nvGrpSpPr>
+        <p:cNvPr id="1" name=""/>
+        <p:cNvGrpSpPr/>
+        <p:nvPr/>
+      </p:nvGrpSpPr>
+      <p:grpSpPr/>
+      <p:sp>
+        <p:nvSpPr>
+          <p:cNvPr id="2" name="Rectangle 1"/>
+          <p:cNvSpPr/>
+          <p:nvPr/>
+        </p:nvSpPr>
+        <p:spPr>
+          <a:xfrm>
+            <a:off x="0" y="0"/>
+            <a:ext cx="12191695" cy="6858000"/>
+          </a:xfrm>
+          <a:prstGeom prst="rect">
+            <a:avLst/>
+          </a:prstGeom>
+          <a:solidFill>
+            <a:srgbClr val="F4F8FC"/>
+          </a:solidFill>
+          <a:ln>
+            <a:noFill/>
+          </a:ln>
+        </p:spPr>
+        <p:style>
+          <a:lnRef idx="1">
+            <a:schemeClr val="accent1"/>
+          </a:lnRef>
+          <a:fillRef idx="3">
+            <a:schemeClr val="accent1"/>
+          </a:fillRef>
+          <a:effectRef idx="2">
+            <a:schemeClr val="accent1"/>
+          </a:effectRef>
+          <a:fontRef idx="minor">
+            <a:schemeClr val="lt1"/>
+          </a:fontRef>
+        </p:style>
+        <p:txBody>
+          <a:bodyPr rtlCol="0" anchor="ctr"/>
+          <a:lstStyle/>
+          <a:p>
+            <a:pPr algn="ctr"/>
+          </a:p>
+        </p:txBody>
+      </p:sp>
+      <p:sp>
+        <p:nvSpPr>
+          <p:cNvPr id="3" name="Rectangle 2"/>
+          <p:cNvSpPr/>
+          <p:nvPr/>
+        </p:nvSpPr>
+        <p:spPr>
+          <a:xfrm>
+            <a:off x="11475720" y="384048"/>
+            <a:ext cx="118872" cy="118872"/>
+          </a:xfrm>
+          <a:prstGeom prst="rect">
+            <a:avLst/>
+          </a:prstGeom>
+          <a:solidFill>
+            <a:srgbClr val="0EA5E9"/>
+          </a:solidFill>
+          <a:ln>
+            <a:noFill/>
+          </a:ln>
+        </p:spPr>
+        <p:style>
+          <a:lnRef idx="1">
+            <a:schemeClr val="accent1"/>
+          </a:lnRef>
+          <a:fillRef idx="3">
+            <a:schemeClr val="accent1"/>
+          </a:fillRef>
+          <a:effectRef idx="2">
+            <a:schemeClr val="accent1"/>
+          </a:effectRef>
+          <a:fontRef idx="minor">
+            <a:schemeClr val="lt1"/>
+          </a:fontRef>
+        </p:style>
+        <p:txBody>
+          <a:bodyPr rtlCol="0" anchor="ctr"/>
+          <a:lstStyle/>
+          <a:p>
+            <a:pPr algn="ctr"/>
+          </a:p>
+        </p:txBody>
+      </p:sp>
+      <p:sp>
+        <p:nvSpPr>
+          <p:cNvPr id="4" name="Rectangle 3"/>
+          <p:cNvSpPr/>
+          <p:nvPr/>
+        </p:nvSpPr>
+        <p:spPr>
+          <a:xfrm>
+            <a:off x="11649456" y="384048"/>
+            <a:ext cx="118872" cy="118872"/>
+          </a:xfrm>
+          <a:prstGeom prst="rect">
+            <a:avLst/>
+          </a:prstGeom>
+          <a:solidFill>
+            <a:srgbClr val="F97316"/>
+          </a:solidFill>
+          <a:ln>
+            <a:noFill/>
+          </a:ln>
+        </p:spPr>
+        <p:style>
+          <a:lnRef idx="1">
+            <a:schemeClr val="accent1"/>
+          </a:lnRef>
+          <a:fillRef idx="3">
+            <a:schemeClr val="accent1"/>
+          </a:fillRef>
+          <a:effectRef idx="2">
+            <a:schemeClr val="accent1"/>
+          </a:effectRef>
+          <a:fontRef idx="minor">
+            <a:schemeClr val="lt1"/>
+          </a:fontRef>
+        </p:style>
+        <p:txBody>
+          <a:bodyPr rtlCol="0" anchor="ctr"/>
+          <a:lstStyle/>
+          <a:p>
+            <a:pPr algn="ctr"/>
+          </a:p>
+        </p:txBody>
+      </p:sp>
+      <p:sp>
+        <p:nvSpPr>
+          <p:cNvPr id="5" name="TextBox 4"/>
+          <p:cNvSpPr txBox="1"/>
+          <p:nvPr/>
+        </p:nvSpPr>
+        <p:spPr>
+          <a:xfrm>
+            <a:off x="502920" y="6510528"/>
+            <a:ext cx="4572000" cy="274320"/>
+          </a:xfrm>
+          <a:prstGeom prst="rect">
+            <a:avLst/>
+          </a:prstGeom>
+          <a:noFill/>
+        </p:spPr>
+        <p:txBody>
+          <a:bodyPr wrap="none">
+            <a:spAutoFit/>
+          </a:bodyPr>
+          <a:lstStyle/>
+          <a:p>
+            <a:r>
+              <a:rPr sz="800" b="0">
+                <a:solidFill>
+                  <a:srgbClr val="8FA3BC"/>
+                </a:solidFill>
+                <a:latin typeface="Calibri"/>
+              </a:rPr>
+              <a:t>Vibe Coding  ·  June 26, 2026</a:t>
+            </a:r>
+          </a:p>
+        </p:txBody>
+      </p:sp>
+      <p:sp>
+        <p:nvSpPr>
+          <p:cNvPr id="6" name="TextBox 5"/>
+          <p:cNvSpPr txBox="1"/>
+          <p:nvPr/>
+        </p:nvSpPr>
+        <p:spPr>
+          <a:xfrm>
+            <a:off x="502920" y="292608"/>
+            <a:ext cx="8229600" cy="274320"/>
+          </a:xfrm>
+          <a:prstGeom prst="rect">
+            <a:avLst/>
+          </a:prstGeom>
+          <a:noFill/>
+        </p:spPr>
+        <p:txBody>
+          <a:bodyPr wrap="none">
+            <a:spAutoFit/>
+          </a:bodyPr>
+          <a:lstStyle/>
+          <a:p>
+            <a:r>
+              <a:rPr sz="1050" b="1">
+                <a:solidFill>
+                  <a:srgbClr val="0284C7"/>
+                </a:solidFill>
+                <a:latin typeface="Arial"/>
+              </a:rPr>
+              <a:t>THE PAYOFF</a:t>
+            </a:r>
+          </a:p>
+        </p:txBody>
+      </p:sp>
+      <p:sp>
+        <p:nvSpPr>
+          <p:cNvPr id="7" name="TextBox 6"/>
+          <p:cNvSpPr txBox="1"/>
+          <p:nvPr/>
+        </p:nvSpPr>
+        <p:spPr>
+          <a:xfrm>
+            <a:off x="502920" y="530352"/>
+            <a:ext cx="10241280" cy="640080"/>
+          </a:xfrm>
+          <a:prstGeom prst="rect">
+            <a:avLst/>
+          </a:prstGeom>
+          <a:noFill/>
+        </p:spPr>
+        <p:txBody>
+          <a:bodyPr wrap="none">
+            <a:spAutoFit/>
+          </a:bodyPr>
+          <a:lstStyle/>
+          <a:p>
+            <a:r>
+              <a:rPr sz="2700" b="0">
+                <a:solidFill>
+                  <a:srgbClr val="0F2740"/>
+                </a:solidFill>
+                <a:latin typeface="Arial Black"/>
+              </a:rPr>
+              <a:t>The Whole Game Is Lego</a:t>
+            </a:r>
+          </a:p>
+        </p:txBody>
+      </p:sp>
+      <p:sp>
+        <p:nvSpPr>
+          <p:cNvPr id="8" name="Rounded Rectangle 7"/>
+          <p:cNvSpPr/>
+          <p:nvPr/>
+        </p:nvSpPr>
+        <p:spPr>
+          <a:xfrm>
+            <a:off x="502920" y="1600200"/>
+            <a:ext cx="5394960" cy="2560320"/>
+          </a:xfrm>
+          <a:prstGeom prst="roundRect">
+            <a:avLst/>
+          </a:prstGeom>
+          <a:solidFill>
+            <a:srgbClr val="FFFFFF"/>
+          </a:solidFill>
+          <a:ln w="12700">
+            <a:solidFill>
+              <a:srgbClr val="DCE6F0"/>
+            </a:solidFill>
+          </a:ln>
+        </p:spPr>
+        <p:style>
+          <a:lnRef idx="1">
+            <a:schemeClr val="accent1"/>
+          </a:lnRef>
+          <a:fillRef idx="3">
+            <a:schemeClr val="accent1"/>
+          </a:fillRef>
+          <a:effectRef idx="2">
+            <a:schemeClr val="accent1"/>
+          </a:effectRef>
+          <a:fontRef idx="minor">
+            <a:schemeClr val="lt1"/>
+          </a:fontRef>
+        </p:style>
+        <p:txBody>
+          <a:bodyPr rtlCol="0" anchor="ctr" lIns="254000" rIns="203200" tIns="203200" wrap="square"/>
+          <a:lstStyle/>
+          <a:p>
+            <a:pPr algn="ctr">
+              <a:spcBef>
+                <a:spcPts val="200"/>
+              </a:spcBef>
+            </a:pPr>
+            <a:r>
+              <a:rPr sz="1200" b="0">
+                <a:solidFill>
+                  <a:srgbClr val="E8F0F8"/>
+                </a:solidFill>
+                <a:latin typeface="Consolas"/>
+              </a:rPr>
+              <a:t>House =</a:t>
+            </a:r>
+          </a:p>
+          <a:p>
+            <a:pPr>
+              <a:spcBef>
+                <a:spcPts val="200"/>
+              </a:spcBef>
+            </a:pPr>
+            <a:r>
+              <a:rPr sz="1200" b="0">
+                <a:solidFill>
+                  <a:srgbClr val="E8F0F8"/>
+                </a:solidFill>
+                <a:latin typeface="Consolas"/>
+              </a:rPr>
+              <a:t>  Foundation</a:t>
+            </a:r>
+          </a:p>
+          <a:p>
+            <a:pPr>
+              <a:spcBef>
+                <a:spcPts val="200"/>
+              </a:spcBef>
+            </a:pPr>
+            <a:r>
+              <a:rPr sz="1200" b="0">
+                <a:solidFill>
+                  <a:srgbClr val="E8F0F8"/>
+                </a:solidFill>
+                <a:latin typeface="Consolas"/>
+              </a:rPr>
+              <a:t>+ Wall + Wall</a:t>
+            </a:r>
+          </a:p>
+          <a:p>
+            <a:pPr>
+              <a:spcBef>
+                <a:spcPts val="200"/>
+              </a:spcBef>
+            </a:pPr>
+            <a:r>
+              <a:rPr sz="1200" b="0">
+                <a:solidFill>
+                  <a:srgbClr val="E8F0F8"/>
+                </a:solidFill>
+                <a:latin typeface="Consolas"/>
+              </a:rPr>
+              <a:t>+ Door + Window</a:t>
+            </a:r>
+          </a:p>
+          <a:p>
+            <a:pPr>
+              <a:spcBef>
+                <a:spcPts val="200"/>
+              </a:spcBef>
+            </a:pPr>
+            <a:r>
+              <a:rPr sz="1200" b="0">
+                <a:solidFill>
+                  <a:srgbClr val="E8F0F8"/>
+                </a:solidFill>
+                <a:latin typeface="Consolas"/>
+              </a:rPr>
+              <a:t>+ Roof</a:t>
+            </a:r>
+          </a:p>
+          <a:p>
+            <a:pPr>
+              <a:spcBef>
+                <a:spcPts val="200"/>
+              </a:spcBef>
+            </a:pPr>
+            <a:r>
+              <a:rPr sz="1200" b="0">
+                <a:solidFill>
+                  <a:srgbClr val="E8F0F8"/>
+                </a:solidFill>
+                <a:latin typeface="Consolas"/>
+              </a:rPr>
+              <a:t/>
+            </a:r>
+          </a:p>
+          <a:p>
+            <a:pPr>
+              <a:spcBef>
+                <a:spcPts val="200"/>
+              </a:spcBef>
+            </a:pPr>
+            <a:r>
+              <a:rPr sz="1200" b="0">
+                <a:solidFill>
+                  <a:srgbClr val="E8F0F8"/>
+                </a:solidFill>
+                <a:latin typeface="Consolas"/>
+              </a:rPr>
+              <a:t>Plane =</a:t>
+            </a:r>
+          </a:p>
+          <a:p>
+            <a:pPr>
+              <a:spcBef>
+                <a:spcPts val="200"/>
+              </a:spcBef>
+            </a:pPr>
+            <a:r>
+              <a:rPr sz="1200" b="0">
+                <a:solidFill>
+                  <a:srgbClr val="E8F0F8"/>
+                </a:solidFill>
+                <a:latin typeface="Consolas"/>
+              </a:rPr>
+              <a:t>  Body + Wing + Engine</a:t>
+            </a:r>
+          </a:p>
+          <a:p>
+            <a:pPr>
+              <a:spcBef>
+                <a:spcPts val="200"/>
+              </a:spcBef>
+            </a:pPr>
+            <a:r>
+              <a:rPr sz="1200" b="0">
+                <a:solidFill>
+                  <a:srgbClr val="E8F0F8"/>
+                </a:solidFill>
+                <a:latin typeface="Consolas"/>
+              </a:rPr>
+              <a:t>+ Cockpit + Seat + Door</a:t>
+            </a:r>
+          </a:p>
+        </p:txBody>
+      </p:sp>
+      <p:sp>
+        <p:nvSpPr>
+          <p:cNvPr id="9" name="Rounded Rectangle 8"/>
+          <p:cNvSpPr/>
+          <p:nvPr/>
+        </p:nvSpPr>
+        <p:spPr>
+          <a:xfrm>
+            <a:off x="6217920" y="1600200"/>
+            <a:ext cx="5394960" cy="2560320"/>
+          </a:xfrm>
+          <a:prstGeom prst="roundRect">
+            <a:avLst/>
+          </a:prstGeom>
+          <a:solidFill>
+            <a:srgbClr val="FFFFFF"/>
+          </a:solidFill>
+          <a:ln w="12700">
+            <a:solidFill>
+              <a:srgbClr val="DCE6F0"/>
+            </a:solidFill>
+          </a:ln>
+        </p:spPr>
+        <p:style>
+          <a:lnRef idx="1">
+            <a:schemeClr val="accent1"/>
+          </a:lnRef>
+          <a:fillRef idx="3">
+            <a:schemeClr val="accent1"/>
+          </a:fillRef>
+          <a:effectRef idx="2">
+            <a:schemeClr val="accent1"/>
+          </a:effectRef>
+          <a:fontRef idx="minor">
+            <a:schemeClr val="lt1"/>
+          </a:fontRef>
+        </p:style>
+        <p:txBody>
+          <a:bodyPr rtlCol="0" anchor="ctr" lIns="254000" rIns="203200" tIns="203200" wrap="square"/>
+          <a:lstStyle/>
+          <a:p>
+            <a:pPr algn="ctr">
+              <a:spcBef>
+                <a:spcPts val="200"/>
+              </a:spcBef>
+            </a:pPr>
+            <a:r>
+              <a:rPr sz="1200" b="0">
+                <a:solidFill>
+                  <a:srgbClr val="E8F0F8"/>
+                </a:solidFill>
+                <a:latin typeface="Consolas"/>
+              </a:rPr>
+              <a:t>Runtime ≠ design doc noun</a:t>
+            </a:r>
+          </a:p>
+          <a:p>
+            <a:pPr>
+              <a:spcBef>
+                <a:spcPts val="200"/>
+              </a:spcBef>
+            </a:pPr>
+            <a:r>
+              <a:rPr sz="1200" b="0">
+                <a:solidFill>
+                  <a:srgbClr val="E8F0F8"/>
+                </a:solidFill>
+                <a:latin typeface="Consolas"/>
+              </a:rPr>
+              <a:t/>
+            </a:r>
+          </a:p>
+          <a:p>
+            <a:pPr>
+              <a:spcBef>
+                <a:spcPts val="200"/>
+              </a:spcBef>
+            </a:pPr>
+            <a:r>
+              <a:rPr sz="1200" b="0">
+                <a:solidFill>
+                  <a:srgbClr val="E8F0F8"/>
+                </a:solidFill>
+                <a:latin typeface="Consolas"/>
+              </a:rPr>
+              <a:t>You never “spawn House”.</a:t>
+            </a:r>
+          </a:p>
+          <a:p>
+            <a:pPr>
+              <a:spcBef>
+                <a:spcPts val="200"/>
+              </a:spcBef>
+            </a:pPr>
+            <a:r>
+              <a:rPr sz="1200" b="0">
+                <a:solidFill>
+                  <a:srgbClr val="E8F0F8"/>
+                </a:solidFill>
+                <a:latin typeface="Consolas"/>
+              </a:rPr>
+              <a:t>You spawn parts with rules.</a:t>
+            </a:r>
+          </a:p>
+          <a:p>
+            <a:pPr>
+              <a:spcBef>
+                <a:spcPts val="200"/>
+              </a:spcBef>
+            </a:pPr>
+            <a:r>
+              <a:rPr sz="1200" b="0">
+                <a:solidFill>
+                  <a:srgbClr val="E8F0F8"/>
+                </a:solidFill>
+                <a:latin typeface="Consolas"/>
+              </a:rPr>
+              <a:t/>
+            </a:r>
+          </a:p>
+          <a:p>
+            <a:pPr>
+              <a:spcBef>
+                <a:spcPts val="200"/>
+              </a:spcBef>
+            </a:pPr>
+            <a:r>
+              <a:rPr sz="1200" b="0">
+                <a:solidFill>
+                  <a:srgbClr val="E8F0F8"/>
+                </a:solidFill>
+                <a:latin typeface="Consolas"/>
+              </a:rPr>
+              <a:t>Each part:</a:t>
+            </a:r>
+          </a:p>
+          <a:p>
+            <a:pPr>
+              <a:spcBef>
+                <a:spcPts val="200"/>
+              </a:spcBef>
+            </a:pPr>
+            <a:r>
+              <a:rPr sz="1200" b="0">
+                <a:solidFill>
+                  <a:srgbClr val="E8F0F8"/>
+                </a:solidFill>
+                <a:latin typeface="Consolas"/>
+              </a:rPr>
+              <a:t>  • loads alone</a:t>
+            </a:r>
+          </a:p>
+          <a:p>
+            <a:pPr>
+              <a:spcBef>
+                <a:spcPts val="200"/>
+              </a:spcBef>
+            </a:pPr>
+            <a:r>
+              <a:rPr sz="1200" b="0">
+                <a:solidFill>
+                  <a:srgbClr val="E8F0F8"/>
+                </a:solidFill>
+                <a:latin typeface="Consolas"/>
+              </a:rPr>
+              <a:t>  • tests alone</a:t>
+            </a:r>
+          </a:p>
+          <a:p>
+            <a:pPr>
+              <a:spcBef>
+                <a:spcPts val="200"/>
+              </a:spcBef>
+            </a:pPr>
+            <a:r>
+              <a:rPr sz="1200" b="0">
+                <a:solidFill>
+                  <a:srgbClr val="E8F0F8"/>
+                </a:solidFill>
+                <a:latin typeface="Consolas"/>
+              </a:rPr>
+              <a:t>  • snaps together</a:t>
+            </a:r>
+          </a:p>
+        </p:txBody>
+      </p:sp>
+      <p:sp>
+        <p:nvSpPr>
+          <p:cNvPr id="10" name="TextBox 9"/>
+          <p:cNvSpPr txBox="1"/>
+          <p:nvPr/>
+        </p:nvSpPr>
+        <p:spPr>
+          <a:xfrm>
+            <a:off x="502920" y="4389120"/>
+            <a:ext cx="11155680" cy="1097280"/>
+          </a:xfrm>
+          <a:prstGeom prst="rect">
+            <a:avLst/>
+          </a:prstGeom>
+          <a:noFill/>
+        </p:spPr>
+        <p:txBody>
+          <a:bodyPr wrap="square">
+            <a:spAutoFit/>
+          </a:bodyPr>
+          <a:lstStyle/>
+          <a:p>
+            <a:pPr>
+              <a:spcBef>
+                <a:spcPts val="800"/>
+              </a:spcBef>
+            </a:pPr>
+            <a:r>
+              <a:rPr sz="1500" b="0">
+                <a:solidFill>
+                  <a:srgbClr val="47566B"/>
+                </a:solidFill>
+                <a:latin typeface="Calibri"/>
+              </a:rPr>
+              <a:t>•  Studios ship worlds by composing verified pieces — not by hoping one giant task lands.</a:t>
+            </a:r>
+          </a:p>
+        </p:txBody>
+      </p:sp>
+      <p:sp>
+        <p:nvSpPr>
+          <p:cNvPr id="11" name="TextBox 10"/>
+          <p:cNvSpPr txBox="1"/>
+          <p:nvPr/>
+        </p:nvSpPr>
+        <p:spPr>
+          <a:xfrm>
+            <a:off x="502920" y="5849280"/>
+            <a:ext cx="11155680" cy="320040"/>
+          </a:xfrm>
+          <a:prstGeom prst="rect">
+            <a:avLst/>
+          </a:prstGeom>
+          <a:noFill/>
+        </p:spPr>
+        <p:txBody>
+          <a:bodyPr wrap="none">
+            <a:spAutoFit/>
+          </a:bodyPr>
+          <a:lstStyle/>
+          <a:p>
+            <a:r>
+              <a:rPr sz="1250" b="1">
+                <a:solidFill>
+                  <a:srgbClr val="F97316"/>
+                </a:solidFill>
+                <a:latin typeface="Calibri"/>
+              </a:rPr>
+              <a:t>Independent parts + composition rules </a:t>
+            </a:r>
+            <a:r>
+              <a:rPr sz="1250" b="0">
+                <a:solidFill>
+                  <a:srgbClr val="47566B"/>
+                </a:solidFill>
+                <a:latin typeface="Calibri"/>
+              </a:rPr>
+              <a:t>= a project that scales.</a:t>
+            </a:r>
+          </a:p>
+        </p:txBody>
+      </p:sp>
+    </p:spTree>
+  </p:cSld>
+  <p:clrMapOvr>
+    <a:masterClrMapping/>
+  </p:clrMapOvr>
+</p:sld>
+</file>
+
+<file path=ppt/slides/slide9.xml><?xml version="1.0" encoding="utf-8"?>
+<p:sld xmlns:a="http://schemas.openxmlformats.org/drawingml/2006/main" xmlns:p="http://schemas.openxmlformats.org/presentationml/2006/main" xmlns:r="http://schemas.openxmlformats.org/officeDocument/2006/relationships">
+  <p:cSld>
+    <p:spTree>
+      <p:nvGrpSpPr>
+        <p:cNvPr id="1" name=""/>
+        <p:cNvGrpSpPr/>
+        <p:nvPr/>
+      </p:nvGrpSpPr>
+      <p:grpSpPr/>
+      <p:sp>
+        <p:nvSpPr>
+          <p:cNvPr id="2" name="Rectangle 1"/>
+          <p:cNvSpPr/>
+          <p:nvPr/>
+        </p:nvSpPr>
+        <p:spPr>
+          <a:xfrm>
+            <a:off x="0" y="0"/>
+            <a:ext cx="12191695" cy="6858000"/>
+          </a:xfrm>
+          <a:prstGeom prst="rect">
+            <a:avLst/>
+          </a:prstGeom>
+          <a:solidFill>
+            <a:srgbClr val="F4F8FC"/>
+          </a:solidFill>
+          <a:ln>
+            <a:noFill/>
+          </a:ln>
+        </p:spPr>
+        <p:style>
+          <a:lnRef idx="1">
+            <a:schemeClr val="accent1"/>
+          </a:lnRef>
+          <a:fillRef idx="3">
+            <a:schemeClr val="accent1"/>
+          </a:fillRef>
+          <a:effectRef idx="2">
+            <a:schemeClr val="accent1"/>
+          </a:effectRef>
+          <a:fontRef idx="minor">
+            <a:schemeClr val="lt1"/>
+          </a:fontRef>
+        </p:style>
+        <p:txBody>
+          <a:bodyPr rtlCol="0" anchor="ctr"/>
+          <a:lstStyle/>
+          <a:p>
+            <a:pPr algn="ctr"/>
+          </a:p>
+        </p:txBody>
+      </p:sp>
+      <p:sp>
+        <p:nvSpPr>
+          <p:cNvPr id="3" name="Rectangle 2"/>
+          <p:cNvSpPr/>
+          <p:nvPr/>
+        </p:nvSpPr>
+        <p:spPr>
+          <a:xfrm>
+            <a:off x="11475720" y="384048"/>
+            <a:ext cx="118872" cy="118872"/>
+          </a:xfrm>
+          <a:prstGeom prst="rect">
+            <a:avLst/>
+          </a:prstGeom>
+          <a:solidFill>
+            <a:srgbClr val="0EA5E9"/>
+          </a:solidFill>
+          <a:ln>
+            <a:noFill/>
+          </a:ln>
+        </p:spPr>
+        <p:style>
+          <a:lnRef idx="1">
+            <a:schemeClr val="accent1"/>
+          </a:lnRef>
+          <a:fillRef idx="3">
+            <a:schemeClr val="accent1"/>
+          </a:fillRef>
+          <a:effectRef idx="2">
+            <a:schemeClr val="accent1"/>
+          </a:effectRef>
+          <a:fontRef idx="minor">
+            <a:schemeClr val="lt1"/>
+          </a:fontRef>
+        </p:style>
+        <p:txBody>
+          <a:bodyPr rtlCol="0" anchor="ctr"/>
+          <a:lstStyle/>
+          <a:p>
+            <a:pPr algn="ctr"/>
+          </a:p>
+        </p:txBody>
+      </p:sp>
+      <p:sp>
+        <p:nvSpPr>
+          <p:cNvPr id="4" name="Rectangle 3"/>
+          <p:cNvSpPr/>
+          <p:nvPr/>
+        </p:nvSpPr>
+        <p:spPr>
+          <a:xfrm>
+            <a:off x="11649456" y="384048"/>
+            <a:ext cx="118872" cy="118872"/>
+          </a:xfrm>
+          <a:prstGeom prst="rect">
+            <a:avLst/>
+          </a:prstGeom>
+          <a:solidFill>
+            <a:srgbClr val="F97316"/>
+          </a:solidFill>
+          <a:ln>
+            <a:noFill/>
+          </a:ln>
+        </p:spPr>
+        <p:style>
+          <a:lnRef idx="1">
+            <a:schemeClr val="accent1"/>
+          </a:lnRef>
+          <a:fillRef idx="3">
+            <a:schemeClr val="accent1"/>
+          </a:fillRef>
+          <a:effectRef idx="2">
+            <a:schemeClr val="accent1"/>
+          </a:effectRef>
+          <a:fontRef idx="minor">
+            <a:schemeClr val="lt1"/>
+          </a:fontRef>
+        </p:style>
+        <p:txBody>
+          <a:bodyPr rtlCol="0" anchor="ctr"/>
+          <a:lstStyle/>
+          <a:p>
+            <a:pPr algn="ctr"/>
+          </a:p>
+        </p:txBody>
+      </p:sp>
+      <p:sp>
+        <p:nvSpPr>
+          <p:cNvPr id="5" name="TextBox 4"/>
+          <p:cNvSpPr txBox="1"/>
+          <p:nvPr/>
+        </p:nvSpPr>
+        <p:spPr>
+          <a:xfrm>
+            <a:off x="502920" y="6510528"/>
+            <a:ext cx="4572000" cy="274320"/>
+          </a:xfrm>
+          <a:prstGeom prst="rect">
+            <a:avLst/>
+          </a:prstGeom>
+          <a:noFill/>
+        </p:spPr>
+        <p:txBody>
+          <a:bodyPr wrap="none">
+            <a:spAutoFit/>
+          </a:bodyPr>
+          <a:lstStyle/>
+          <a:p>
+            <a:r>
+              <a:rPr sz="800" b="0">
+                <a:solidFill>
+                  <a:srgbClr val="8FA3BC"/>
+                </a:solidFill>
+                <a:latin typeface="Calibri"/>
+              </a:rPr>
+              <a:t>Vibe Coding  ·  June 26, 2026</a:t>
+            </a:r>
+          </a:p>
+        </p:txBody>
+      </p:sp>
+      <p:sp>
+        <p:nvSpPr>
+          <p:cNvPr id="6" name="TextBox 5"/>
+          <p:cNvSpPr txBox="1"/>
+          <p:nvPr/>
+        </p:nvSpPr>
+        <p:spPr>
+          <a:xfrm>
+            <a:off x="502920" y="292608"/>
+            <a:ext cx="8229600" cy="274320"/>
+          </a:xfrm>
+          <a:prstGeom prst="rect">
+            <a:avLst/>
+          </a:prstGeom>
+          <a:noFill/>
+        </p:spPr>
+        <p:txBody>
+          <a:bodyPr wrap="none">
+            <a:spAutoFit/>
+          </a:bodyPr>
+          <a:lstStyle/>
+          <a:p>
+            <a:r>
+              <a:rPr sz="1050" b="1">
+                <a:solidFill>
+                  <a:srgbClr val="0284C7"/>
+                </a:solidFill>
+                <a:latin typeface="Arial"/>
+              </a:rPr>
+              <a:t>WHEN TO STOP</a:t>
+            </a:r>
+          </a:p>
+        </p:txBody>
+      </p:sp>
+      <p:sp>
+        <p:nvSpPr>
+          <p:cNvPr id="7" name="TextBox 6"/>
+          <p:cNvSpPr txBox="1"/>
+          <p:nvPr/>
+        </p:nvSpPr>
+        <p:spPr>
+          <a:xfrm>
+            <a:off x="502920" y="530352"/>
+            <a:ext cx="10241280" cy="640080"/>
+          </a:xfrm>
+          <a:prstGeom prst="rect">
+            <a:avLst/>
+          </a:prstGeom>
+          <a:noFill/>
+        </p:spPr>
+        <p:txBody>
+          <a:bodyPr wrap="none">
+            <a:spAutoFit/>
+          </a:bodyPr>
+          <a:lstStyle/>
+          <a:p>
+            <a:r>
+              <a:rPr sz="2700" b="0">
+                <a:solidFill>
+                  <a:srgbClr val="0F2740"/>
+                </a:solidFill>
+                <a:latin typeface="Arial Black"/>
+              </a:rPr>
+              <a:t>The Stopping Rule</a:t>
+            </a:r>
+          </a:p>
+        </p:txBody>
+      </p:sp>
+      <p:sp>
+        <p:nvSpPr>
+          <p:cNvPr id="8" name="TextBox 7"/>
+          <p:cNvSpPr txBox="1"/>
+          <p:nvPr/>
+        </p:nvSpPr>
+        <p:spPr>
+          <a:xfrm>
+            <a:off x="502920" y="1554480"/>
+            <a:ext cx="5486400" cy="3840480"/>
+          </a:xfrm>
+          <a:prstGeom prst="rect">
+            <a:avLst/>
+          </a:prstGeom>
+          <a:noFill/>
+        </p:spPr>
+        <p:txBody>
+          <a:bodyPr wrap="square">
+            <a:spAutoFit/>
+          </a:bodyPr>
+          <a:lstStyle/>
+          <a:p>
+            <a:pPr>
+              <a:spcBef>
+                <a:spcPts val="800"/>
+              </a:spcBef>
+            </a:pPr>
+            <a:r>
+              <a:rPr sz="1500" b="0">
+                <a:solidFill>
+                  <a:srgbClr val="47566B"/>
+                </a:solidFill>
+                <a:latin typeface="Calibri"/>
+              </a:rPr>
+              <a:t>•  One person can finish it in one focused session.</a:t>
+            </a:r>
+          </a:p>
+          <a:p>
+            <a:pPr>
+              <a:spcBef>
+                <a:spcPts val="800"/>
+              </a:spcBef>
+            </a:pPr>
+            <a:r>
+              <a:rPr sz="1500" b="0">
+                <a:solidFill>
+                  <a:srgbClr val="47566B"/>
+                </a:solidFill>
+                <a:latin typeface="Calibri"/>
+              </a:rPr>
+              <a:t>•  One clear deliverable: a model, anim, script, or material.</a:t>
+            </a:r>
+          </a:p>
+          <a:p>
+            <a:pPr>
+              <a:spcBef>
+                <a:spcPts val="800"/>
+              </a:spcBef>
+            </a:pPr>
+            <a:r>
+              <a:rPr sz="1500" b="0">
+                <a:solidFill>
+                  <a:srgbClr val="47566B"/>
+                </a:solidFill>
+                <a:latin typeface="Calibri"/>
+              </a:rPr>
+              <a:t>•  You can verify it without waiting on other new work.</a:t>
+            </a:r>
+          </a:p>
+          <a:p>
+            <a:pPr>
+              <a:spcBef>
+                <a:spcPts val="800"/>
+              </a:spcBef>
+            </a:pPr>
+            <a:r>
+              <a:rPr sz="1500" b="0">
+                <a:solidFill>
+                  <a:srgbClr val="47566B"/>
+                </a:solidFill>
+                <a:latin typeface="Calibri"/>
+              </a:rPr>
+              <a:t>•  Typical sweet spot: 30 minutes to 4 hours.</a:t>
+            </a:r>
+          </a:p>
+        </p:txBody>
+      </p:sp>
+      <p:sp>
+        <p:nvSpPr>
+          <p:cNvPr id="9" name="Rounded Rectangle 8"/>
+          <p:cNvSpPr/>
+          <p:nvPr/>
+        </p:nvSpPr>
+        <p:spPr>
+          <a:xfrm>
+            <a:off x="6217920" y="1554480"/>
+            <a:ext cx="5394960" cy="3840480"/>
+          </a:xfrm>
+          <a:prstGeom prst="roundRect">
+            <a:avLst/>
+          </a:prstGeom>
+          <a:solidFill>
+            <a:srgbClr val="FFFFFF"/>
+          </a:solidFill>
+          <a:ln w="12700">
+            <a:solidFill>
+              <a:srgbClr val="DCE6F0"/>
+            </a:solidFill>
+          </a:ln>
+        </p:spPr>
+        <p:style>
+          <a:lnRef idx="1">
+            <a:schemeClr val="accent1"/>
+          </a:lnRef>
+          <a:fillRef idx="3">
+            <a:schemeClr val="accent1"/>
+          </a:fillRef>
+          <a:effectRef idx="2">
+            <a:schemeClr val="accent1"/>
+          </a:effectRef>
+          <a:fontRef idx="minor">
+            <a:schemeClr val="lt1"/>
+          </a:fontRef>
+        </p:style>
+        <p:txBody>
+          <a:bodyPr rtlCol="0" anchor="ctr" lIns="254000" rIns="203200" tIns="203200" wrap="square"/>
+          <a:lstStyle/>
+          <a:p>
+            <a:pPr algn="ctr">
+              <a:spcBef>
+                <a:spcPts val="200"/>
+              </a:spcBef>
+            </a:pPr>
+            <a:r>
+              <a:rPr sz="1100" b="0">
+                <a:solidFill>
+                  <a:srgbClr val="E8F0F8"/>
+                </a:solidFill>
+                <a:latin typeface="Consolas"/>
+              </a:rPr>
+              <a:t>❌  Build a house</a:t>
+            </a:r>
+          </a:p>
+          <a:p>
+            <a:pPr>
+              <a:spcBef>
+                <a:spcPts val="200"/>
+              </a:spcBef>
+            </a:pPr>
+            <a:r>
+              <a:rPr sz="1100" b="0">
+                <a:solidFill>
+                  <a:srgbClr val="E8F0F8"/>
+                </a:solidFill>
+                <a:latin typeface="Consolas"/>
+              </a:rPr>
+              <a:t/>
+            </a:r>
+          </a:p>
+          <a:p>
+            <a:pPr>
+              <a:spcBef>
+                <a:spcPts val="200"/>
+              </a:spcBef>
+            </a:pPr>
+            <a:r>
+              <a:rPr sz="1100" b="0">
+                <a:solidFill>
+                  <a:srgbClr val="E8F0F8"/>
+                </a:solidFill>
+                <a:latin typeface="Consolas"/>
+              </a:rPr>
+              <a:t>□  Wall model</a:t>
+            </a:r>
+          </a:p>
+          <a:p>
+            <a:pPr>
+              <a:spcBef>
+                <a:spcPts val="200"/>
+              </a:spcBef>
+            </a:pPr>
+            <a:r>
+              <a:rPr sz="1100" b="0">
+                <a:solidFill>
+                  <a:srgbClr val="E8F0F8"/>
+                </a:solidFill>
+                <a:latin typeface="Consolas"/>
+              </a:rPr>
+              <a:t>□  Door model</a:t>
+            </a:r>
+          </a:p>
+          <a:p>
+            <a:pPr>
+              <a:spcBef>
+                <a:spcPts val="200"/>
+              </a:spcBef>
+            </a:pPr>
+            <a:r>
+              <a:rPr sz="1100" b="0">
+                <a:solidFill>
+                  <a:srgbClr val="E8F0F8"/>
+                </a:solidFill>
+                <a:latin typeface="Consolas"/>
+              </a:rPr>
+              <a:t>□  Window model</a:t>
+            </a:r>
+          </a:p>
+          <a:p>
+            <a:pPr>
+              <a:spcBef>
+                <a:spcPts val="200"/>
+              </a:spcBef>
+            </a:pPr>
+            <a:r>
+              <a:rPr sz="1100" b="0">
+                <a:solidFill>
+                  <a:srgbClr val="E8F0F8"/>
+                </a:solidFill>
+                <a:latin typeface="Consolas"/>
+              </a:rPr>
+              <a:t>□  Wall placement script</a:t>
+            </a:r>
+          </a:p>
+          <a:p>
+            <a:pPr>
+              <a:spcBef>
+                <a:spcPts val="200"/>
+              </a:spcBef>
+            </a:pPr>
+            <a:r>
+              <a:rPr sz="1100" b="0">
+                <a:solidFill>
+                  <a:srgbClr val="E8F0F8"/>
+                </a:solidFill>
+                <a:latin typeface="Consolas"/>
+              </a:rPr>
+              <a:t>□  Door open/close script</a:t>
+            </a:r>
+          </a:p>
+          <a:p>
+            <a:pPr>
+              <a:spcBef>
+                <a:spcPts val="200"/>
+              </a:spcBef>
+            </a:pPr>
+            <a:r>
+              <a:rPr sz="1100" b="0">
+                <a:solidFill>
+                  <a:srgbClr val="E8F0F8"/>
+                </a:solidFill>
+                <a:latin typeface="Consolas"/>
+              </a:rPr>
+              <a:t>□  Roof snap script</a:t>
+            </a:r>
+          </a:p>
+          <a:p>
+            <a:pPr>
+              <a:spcBef>
+                <a:spcPts val="200"/>
+              </a:spcBef>
+            </a:pPr>
+            <a:r>
+              <a:rPr sz="1100" b="0">
+                <a:solidFill>
+                  <a:srgbClr val="E8F0F8"/>
+                </a:solidFill>
+                <a:latin typeface="Consolas"/>
+              </a:rPr>
+              <a:t/>
+            </a:r>
+          </a:p>
+          <a:p>
+            <a:pPr>
+              <a:spcBef>
+                <a:spcPts val="200"/>
+              </a:spcBef>
+            </a:pPr>
+            <a:r>
+              <a:rPr sz="1100" b="0">
+                <a:solidFill>
+                  <a:srgbClr val="E8F0F8"/>
+                </a:solidFill>
+                <a:latin typeface="Consolas"/>
+              </a:rPr>
+              <a:t>Still too big? Split again.</a:t>
+            </a:r>
+          </a:p>
+          <a:p>
+            <a:pPr>
+              <a:spcBef>
+                <a:spcPts val="200"/>
+              </a:spcBef>
+            </a:pPr>
+            <a:r>
+              <a:rPr sz="1100" b="0">
+                <a:solidFill>
+                  <a:srgbClr val="E8F0F8"/>
+                </a:solidFill>
+                <a:latin typeface="Consolas"/>
+              </a:rPr>
+              <a:t>Small enough? Ship &amp; test.</a:t>
+            </a:r>
+          </a:p>
+        </p:txBody>
+      </p:sp>
+      <p:sp>
+        <p:nvSpPr>
+          <p:cNvPr id="10" name="TextBox 9"/>
+          <p:cNvSpPr txBox="1"/>
+          <p:nvPr/>
+        </p:nvSpPr>
+        <p:spPr>
+          <a:xfrm>
+            <a:off x="502920" y="5669280"/>
+            <a:ext cx="11155680" cy="320040"/>
+          </a:xfrm>
+          <a:prstGeom prst="rect">
+            <a:avLst/>
+          </a:prstGeom>
+          <a:noFill/>
+        </p:spPr>
+        <p:txBody>
+          <a:bodyPr wrap="none">
+            <a:spAutoFit/>
+          </a:bodyPr>
+          <a:lstStyle/>
+          <a:p>
+            <a:r>
+              <a:rPr sz="1250" b="1">
+                <a:solidFill>
+                  <a:srgbClr val="F97316"/>
+                </a:solidFill>
+                <a:latin typeface="Calibri"/>
+              </a:rPr>
+              <a:t>If “wall model” takes days, </a:t>
+            </a:r>
+            <a:r>
+              <a:rPr sz="1250" b="0">
+                <a:solidFill>
+                  <a:srgbClr val="47566B"/>
+                </a:solidFill>
+                <a:latin typeface="Calibri"/>
+              </a:rPr>
+              <a:t>UV and texture are separate tasks.</a:t>
             </a:r>
           </a:p>
         </p:txBody>
